--- a/course/course8.pptx
+++ b/course/course8.pptx
@@ -5,11 +5,12 @@
     <p:sldMasterId id="2147483825" r:id="rId1"/>
   </p:sldMasterIdLst>
   <p:notesMasterIdLst>
-    <p:notesMasterId r:id="rId4"/>
+    <p:notesMasterId r:id="rId5"/>
   </p:notesMasterIdLst>
   <p:sldIdLst>
     <p:sldId id="256" r:id="rId2"/>
     <p:sldId id="279" r:id="rId3"/>
+    <p:sldId id="280" r:id="rId4"/>
   </p:sldIdLst>
   <p:sldSz cx="9144000" cy="5143500" type="screen16x9"/>
   <p:notesSz cx="6858000" cy="9144000"/>
@@ -198,7 +199,7 @@
           <a:p>
             <a:fld id="{B157FD80-104E-477A-84DF-AAA7C9A1979B}" type="datetimeFigureOut">
               <a:rPr lang="en-ZA" smtClean="0"/>
-              <a:t>2026/06/19</a:t>
+              <a:t>2026/07/03</a:t>
             </a:fld>
             <a:endParaRPr lang="en-ZA"/>
           </a:p>
@@ -615,7 +616,7 @@
           <a:p>
             <a:fld id="{8353421B-4862-4D3A-B9AB-BA663EF3CA0D}" type="datetimeFigureOut">
               <a:rPr lang="en-ZA" smtClean="0"/>
-              <a:t>2026/06/19</a:t>
+              <a:t>2026/07/03</a:t>
             </a:fld>
             <a:endParaRPr lang="en-ZA"/>
           </a:p>
@@ -815,7 +816,7 @@
           <a:p>
             <a:fld id="{8353421B-4862-4D3A-B9AB-BA663EF3CA0D}" type="datetimeFigureOut">
               <a:rPr lang="en-ZA" smtClean="0"/>
-              <a:t>2026/06/19</a:t>
+              <a:t>2026/07/03</a:t>
             </a:fld>
             <a:endParaRPr lang="en-ZA"/>
           </a:p>
@@ -1025,7 +1026,7 @@
           <a:p>
             <a:fld id="{8353421B-4862-4D3A-B9AB-BA663EF3CA0D}" type="datetimeFigureOut">
               <a:rPr lang="en-ZA" smtClean="0"/>
-              <a:t>2026/06/19</a:t>
+              <a:t>2026/07/03</a:t>
             </a:fld>
             <a:endParaRPr lang="en-ZA"/>
           </a:p>
@@ -1506,7 +1507,7 @@
           <a:p>
             <a:fld id="{8353421B-4862-4D3A-B9AB-BA663EF3CA0D}" type="datetimeFigureOut">
               <a:rPr lang="en-ZA" smtClean="0"/>
-              <a:t>2026/06/19</a:t>
+              <a:t>2026/07/03</a:t>
             </a:fld>
             <a:endParaRPr lang="en-ZA"/>
           </a:p>
@@ -1782,7 +1783,7 @@
           <a:p>
             <a:fld id="{8353421B-4862-4D3A-B9AB-BA663EF3CA0D}" type="datetimeFigureOut">
               <a:rPr lang="en-ZA" smtClean="0"/>
-              <a:t>2026/06/19</a:t>
+              <a:t>2026/07/03</a:t>
             </a:fld>
             <a:endParaRPr lang="en-ZA"/>
           </a:p>
@@ -2050,7 +2051,7 @@
           <a:p>
             <a:fld id="{8353421B-4862-4D3A-B9AB-BA663EF3CA0D}" type="datetimeFigureOut">
               <a:rPr lang="en-ZA" smtClean="0"/>
-              <a:t>2026/06/19</a:t>
+              <a:t>2026/07/03</a:t>
             </a:fld>
             <a:endParaRPr lang="en-ZA"/>
           </a:p>
@@ -2465,7 +2466,7 @@
           <a:p>
             <a:fld id="{8353421B-4862-4D3A-B9AB-BA663EF3CA0D}" type="datetimeFigureOut">
               <a:rPr lang="en-ZA" smtClean="0"/>
-              <a:t>2026/06/19</a:t>
+              <a:t>2026/07/03</a:t>
             </a:fld>
             <a:endParaRPr lang="en-ZA"/>
           </a:p>
@@ -2607,7 +2608,7 @@
           <a:p>
             <a:fld id="{8353421B-4862-4D3A-B9AB-BA663EF3CA0D}" type="datetimeFigureOut">
               <a:rPr lang="en-ZA" smtClean="0"/>
-              <a:t>2026/06/19</a:t>
+              <a:t>2026/07/03</a:t>
             </a:fld>
             <a:endParaRPr lang="en-ZA"/>
           </a:p>
@@ -2720,7 +2721,7 @@
           <a:p>
             <a:fld id="{8353421B-4862-4D3A-B9AB-BA663EF3CA0D}" type="datetimeFigureOut">
               <a:rPr lang="en-ZA" smtClean="0"/>
-              <a:t>2026/06/19</a:t>
+              <a:t>2026/07/03</a:t>
             </a:fld>
             <a:endParaRPr lang="en-ZA"/>
           </a:p>
@@ -3033,7 +3034,7 @@
           <a:p>
             <a:fld id="{8353421B-4862-4D3A-B9AB-BA663EF3CA0D}" type="datetimeFigureOut">
               <a:rPr lang="en-ZA" smtClean="0"/>
-              <a:t>2026/06/19</a:t>
+              <a:t>2026/07/03</a:t>
             </a:fld>
             <a:endParaRPr lang="en-ZA"/>
           </a:p>
@@ -3322,7 +3323,7 @@
           <a:p>
             <a:fld id="{8353421B-4862-4D3A-B9AB-BA663EF3CA0D}" type="datetimeFigureOut">
               <a:rPr lang="en-ZA" smtClean="0"/>
-              <a:t>2026/06/19</a:t>
+              <a:t>2026/07/03</a:t>
             </a:fld>
             <a:endParaRPr lang="en-ZA"/>
           </a:p>
@@ -3575,7 +3576,7 @@
           <a:p>
             <a:fld id="{8353421B-4862-4D3A-B9AB-BA663EF3CA0D}" type="datetimeFigureOut">
               <a:rPr lang="en-ZA" smtClean="0"/>
-              <a:t>2026/06/19</a:t>
+              <a:t>2026/07/03</a:t>
             </a:fld>
             <a:endParaRPr lang="en-ZA"/>
           </a:p>
@@ -4098,6 +4099,36 @@
     <p:extLst>
       <p:ext uri="{BB962C8B-B14F-4D97-AF65-F5344CB8AC3E}">
         <p14:creationId xmlns:p14="http://schemas.microsoft.com/office/powerpoint/2010/main" val="4044890053"/>
+      </p:ext>
+    </p:extLst>
+  </p:cSld>
+  <p:clrMapOvr>
+    <a:masterClrMapping/>
+  </p:clrMapOvr>
+</p:sld>
+</file>
+
+<file path=ppt/slides/slide3.xml><?xml version="1.0" encoding="utf-8"?>
+<p:sld xmlns:a="http://schemas.openxmlformats.org/drawingml/2006/main" xmlns:r="http://schemas.openxmlformats.org/officeDocument/2006/relationships" xmlns:p="http://schemas.openxmlformats.org/presentationml/2006/main">
+  <p:cSld>
+    <p:spTree>
+      <p:nvGrpSpPr>
+        <p:cNvPr id="1" name=""/>
+        <p:cNvGrpSpPr/>
+        <p:nvPr/>
+      </p:nvGrpSpPr>
+      <p:grpSpPr>
+        <a:xfrm>
+          <a:off x="0" y="0"/>
+          <a:ext cx="0" cy="0"/>
+          <a:chOff x="0" y="0"/>
+          <a:chExt cx="0" cy="0"/>
+        </a:xfrm>
+      </p:grpSpPr>
+    </p:spTree>
+    <p:extLst>
+      <p:ext uri="{BB962C8B-B14F-4D97-AF65-F5344CB8AC3E}">
+        <p14:creationId xmlns:p14="http://schemas.microsoft.com/office/powerpoint/2010/main" val="4242187192"/>
       </p:ext>
     </p:extLst>
   </p:cSld>

--- a/course/course8.pptx
+++ b/course/course8.pptx
@@ -5,12 +5,21 @@
     <p:sldMasterId id="2147483825" r:id="rId1"/>
   </p:sldMasterIdLst>
   <p:notesMasterIdLst>
-    <p:notesMasterId r:id="rId5"/>
+    <p:notesMasterId r:id="rId14"/>
   </p:notesMasterIdLst>
   <p:sldIdLst>
     <p:sldId id="256" r:id="rId2"/>
     <p:sldId id="279" r:id="rId3"/>
-    <p:sldId id="280" r:id="rId4"/>
+    <p:sldId id="281" r:id="rId4"/>
+    <p:sldId id="280" r:id="rId5"/>
+    <p:sldId id="282" r:id="rId6"/>
+    <p:sldId id="283" r:id="rId7"/>
+    <p:sldId id="284" r:id="rId8"/>
+    <p:sldId id="285" r:id="rId9"/>
+    <p:sldId id="286" r:id="rId10"/>
+    <p:sldId id="287" r:id="rId11"/>
+    <p:sldId id="288" r:id="rId12"/>
+    <p:sldId id="289" r:id="rId13"/>
   </p:sldIdLst>
   <p:sldSz cx="9144000" cy="5143500" type="screen16x9"/>
   <p:notesSz cx="6858000" cy="9144000"/>
@@ -117,6 +126,18 @@
 </p:presentation>
 </file>
 
+<file path=ppt/commentAuthors.xml><?xml version="1.0" encoding="utf-8"?>
+<p:cmAuthorLst xmlns:a="http://schemas.openxmlformats.org/drawingml/2006/main" xmlns:r="http://schemas.openxmlformats.org/officeDocument/2006/relationships" xmlns:p="http://schemas.openxmlformats.org/presentationml/2006/main">
+  <p:cmAuthor id="1" name="BENSLIMANE CH" initials="BC" lastIdx="1" clrIdx="0">
+    <p:extLst>
+      <p:ext uri="{19B8F6BF-5375-455C-9EA6-DF929625EA0E}">
+        <p15:presenceInfo xmlns:p15="http://schemas.microsoft.com/office/powerpoint/2012/main" userId="b3cab72e69019fa7" providerId="Windows Live"/>
+      </p:ext>
+    </p:extLst>
+  </p:cmAuthor>
+</p:cmAuthorLst>
+</file>
+
 <file path=ppt/notesMasters/notesMaster1.xml><?xml version="1.0" encoding="utf-8"?>
 <p:notesMaster xmlns:a="http://schemas.openxmlformats.org/drawingml/2006/main" xmlns:r="http://schemas.openxmlformats.org/officeDocument/2006/relationships" xmlns:p="http://schemas.openxmlformats.org/presentationml/2006/main">
   <p:cSld>
@@ -199,7 +220,7 @@
           <a:p>
             <a:fld id="{B157FD80-104E-477A-84DF-AAA7C9A1979B}" type="datetimeFigureOut">
               <a:rPr lang="en-ZA" smtClean="0"/>
-              <a:t>2026/07/03</a:t>
+              <a:t>2026/07/07</a:t>
             </a:fld>
             <a:endParaRPr lang="en-ZA"/>
           </a:p>
@@ -616,7 +637,7 @@
           <a:p>
             <a:fld id="{8353421B-4862-4D3A-B9AB-BA663EF3CA0D}" type="datetimeFigureOut">
               <a:rPr lang="en-ZA" smtClean="0"/>
-              <a:t>2026/07/03</a:t>
+              <a:t>2026/07/07</a:t>
             </a:fld>
             <a:endParaRPr lang="en-ZA"/>
           </a:p>
@@ -816,7 +837,7 @@
           <a:p>
             <a:fld id="{8353421B-4862-4D3A-B9AB-BA663EF3CA0D}" type="datetimeFigureOut">
               <a:rPr lang="en-ZA" smtClean="0"/>
-              <a:t>2026/07/03</a:t>
+              <a:t>2026/07/07</a:t>
             </a:fld>
             <a:endParaRPr lang="en-ZA"/>
           </a:p>
@@ -1026,7 +1047,7 @@
           <a:p>
             <a:fld id="{8353421B-4862-4D3A-B9AB-BA663EF3CA0D}" type="datetimeFigureOut">
               <a:rPr lang="en-ZA" smtClean="0"/>
-              <a:t>2026/07/03</a:t>
+              <a:t>2026/07/07</a:t>
             </a:fld>
             <a:endParaRPr lang="en-ZA"/>
           </a:p>
@@ -1507,7 +1528,7 @@
           <a:p>
             <a:fld id="{8353421B-4862-4D3A-B9AB-BA663EF3CA0D}" type="datetimeFigureOut">
               <a:rPr lang="en-ZA" smtClean="0"/>
-              <a:t>2026/07/03</a:t>
+              <a:t>2026/07/07</a:t>
             </a:fld>
             <a:endParaRPr lang="en-ZA"/>
           </a:p>
@@ -1783,7 +1804,7 @@
           <a:p>
             <a:fld id="{8353421B-4862-4D3A-B9AB-BA663EF3CA0D}" type="datetimeFigureOut">
               <a:rPr lang="en-ZA" smtClean="0"/>
-              <a:t>2026/07/03</a:t>
+              <a:t>2026/07/07</a:t>
             </a:fld>
             <a:endParaRPr lang="en-ZA"/>
           </a:p>
@@ -2051,7 +2072,7 @@
           <a:p>
             <a:fld id="{8353421B-4862-4D3A-B9AB-BA663EF3CA0D}" type="datetimeFigureOut">
               <a:rPr lang="en-ZA" smtClean="0"/>
-              <a:t>2026/07/03</a:t>
+              <a:t>2026/07/07</a:t>
             </a:fld>
             <a:endParaRPr lang="en-ZA"/>
           </a:p>
@@ -2466,7 +2487,7 @@
           <a:p>
             <a:fld id="{8353421B-4862-4D3A-B9AB-BA663EF3CA0D}" type="datetimeFigureOut">
               <a:rPr lang="en-ZA" smtClean="0"/>
-              <a:t>2026/07/03</a:t>
+              <a:t>2026/07/07</a:t>
             </a:fld>
             <a:endParaRPr lang="en-ZA"/>
           </a:p>
@@ -2608,7 +2629,7 @@
           <a:p>
             <a:fld id="{8353421B-4862-4D3A-B9AB-BA663EF3CA0D}" type="datetimeFigureOut">
               <a:rPr lang="en-ZA" smtClean="0"/>
-              <a:t>2026/07/03</a:t>
+              <a:t>2026/07/07</a:t>
             </a:fld>
             <a:endParaRPr lang="en-ZA"/>
           </a:p>
@@ -2721,7 +2742,7 @@
           <a:p>
             <a:fld id="{8353421B-4862-4D3A-B9AB-BA663EF3CA0D}" type="datetimeFigureOut">
               <a:rPr lang="en-ZA" smtClean="0"/>
-              <a:t>2026/07/03</a:t>
+              <a:t>2026/07/07</a:t>
             </a:fld>
             <a:endParaRPr lang="en-ZA"/>
           </a:p>
@@ -3034,7 +3055,7 @@
           <a:p>
             <a:fld id="{8353421B-4862-4D3A-B9AB-BA663EF3CA0D}" type="datetimeFigureOut">
               <a:rPr lang="en-ZA" smtClean="0"/>
-              <a:t>2026/07/03</a:t>
+              <a:t>2026/07/07</a:t>
             </a:fld>
             <a:endParaRPr lang="en-ZA"/>
           </a:p>
@@ -3323,7 +3344,7 @@
           <a:p>
             <a:fld id="{8353421B-4862-4D3A-B9AB-BA663EF3CA0D}" type="datetimeFigureOut">
               <a:rPr lang="en-ZA" smtClean="0"/>
-              <a:t>2026/07/03</a:t>
+              <a:t>2026/07/07</a:t>
             </a:fld>
             <a:endParaRPr lang="en-ZA"/>
           </a:p>
@@ -3576,7 +3597,7 @@
           <a:p>
             <a:fld id="{8353421B-4862-4D3A-B9AB-BA663EF3CA0D}" type="datetimeFigureOut">
               <a:rPr lang="en-ZA" smtClean="0"/>
-              <a:t>2026/07/03</a:t>
+              <a:t>2026/07/07</a:t>
             </a:fld>
             <a:endParaRPr lang="en-ZA"/>
           </a:p>
@@ -4078,6 +4099,156 @@
 </p:sld>
 </file>
 
+<file path=ppt/slides/slide10.xml><?xml version="1.0" encoding="utf-8"?>
+<p:sld xmlns:a="http://schemas.openxmlformats.org/drawingml/2006/main" xmlns:r="http://schemas.openxmlformats.org/officeDocument/2006/relationships" xmlns:p="http://schemas.openxmlformats.org/presentationml/2006/main">
+  <p:cSld>
+    <p:spTree>
+      <p:nvGrpSpPr>
+        <p:cNvPr id="1" name=""/>
+        <p:cNvGrpSpPr/>
+        <p:nvPr/>
+      </p:nvGrpSpPr>
+      <p:grpSpPr>
+        <a:xfrm>
+          <a:off x="0" y="0"/>
+          <a:ext cx="0" cy="0"/>
+          <a:chOff x="0" y="0"/>
+          <a:chExt cx="0" cy="0"/>
+        </a:xfrm>
+      </p:grpSpPr>
+      <p:pic>
+        <p:nvPicPr>
+          <p:cNvPr id="3" name="Image 2">
+            <a:extLst>
+              <a:ext uri="{FF2B5EF4-FFF2-40B4-BE49-F238E27FC236}">
+                <a16:creationId xmlns:a16="http://schemas.microsoft.com/office/drawing/2014/main" id="{F5006178-7923-46F5-87AB-C864D696B01A}"/>
+              </a:ext>
+            </a:extLst>
+          </p:cNvPr>
+          <p:cNvPicPr>
+            <a:picLocks noChangeAspect="1"/>
+          </p:cNvPicPr>
+          <p:nvPr/>
+        </p:nvPicPr>
+        <p:blipFill>
+          <a:blip r:embed="rId2"/>
+          <a:stretch>
+            <a:fillRect/>
+          </a:stretch>
+        </p:blipFill>
+        <p:spPr>
+          <a:xfrm>
+            <a:off x="0" y="75902"/>
+            <a:ext cx="9144000" cy="4991695"/>
+          </a:xfrm>
+          <a:prstGeom prst="rect">
+            <a:avLst/>
+          </a:prstGeom>
+        </p:spPr>
+      </p:pic>
+    </p:spTree>
+    <p:extLst>
+      <p:ext uri="{BB962C8B-B14F-4D97-AF65-F5344CB8AC3E}">
+        <p14:creationId xmlns:p14="http://schemas.microsoft.com/office/powerpoint/2010/main" val="2312019106"/>
+      </p:ext>
+    </p:extLst>
+  </p:cSld>
+  <p:clrMapOvr>
+    <a:masterClrMapping/>
+  </p:clrMapOvr>
+</p:sld>
+</file>
+
+<file path=ppt/slides/slide11.xml><?xml version="1.0" encoding="utf-8"?>
+<p:sld xmlns:a="http://schemas.openxmlformats.org/drawingml/2006/main" xmlns:r="http://schemas.openxmlformats.org/officeDocument/2006/relationships" xmlns:p="http://schemas.openxmlformats.org/presentationml/2006/main">
+  <p:cSld>
+    <p:spTree>
+      <p:nvGrpSpPr>
+        <p:cNvPr id="1" name=""/>
+        <p:cNvGrpSpPr/>
+        <p:nvPr/>
+      </p:nvGrpSpPr>
+      <p:grpSpPr>
+        <a:xfrm>
+          <a:off x="0" y="0"/>
+          <a:ext cx="0" cy="0"/>
+          <a:chOff x="0" y="0"/>
+          <a:chExt cx="0" cy="0"/>
+        </a:xfrm>
+      </p:grpSpPr>
+      <p:pic>
+        <p:nvPicPr>
+          <p:cNvPr id="2" name="Image 1">
+            <a:extLst>
+              <a:ext uri="{FF2B5EF4-FFF2-40B4-BE49-F238E27FC236}">
+                <a16:creationId xmlns:a16="http://schemas.microsoft.com/office/drawing/2014/main" id="{C6092D18-FCE6-4C86-A147-E2D332D7659A}"/>
+              </a:ext>
+            </a:extLst>
+          </p:cNvPr>
+          <p:cNvPicPr>
+            <a:picLocks noChangeAspect="1"/>
+          </p:cNvPicPr>
+          <p:nvPr/>
+        </p:nvPicPr>
+        <p:blipFill>
+          <a:blip r:embed="rId2"/>
+          <a:stretch>
+            <a:fillRect/>
+          </a:stretch>
+        </p:blipFill>
+        <p:spPr>
+          <a:xfrm>
+            <a:off x="558593" y="25269"/>
+            <a:ext cx="8026813" cy="5092962"/>
+          </a:xfrm>
+          <a:prstGeom prst="rect">
+            <a:avLst/>
+          </a:prstGeom>
+        </p:spPr>
+      </p:pic>
+    </p:spTree>
+    <p:extLst>
+      <p:ext uri="{BB962C8B-B14F-4D97-AF65-F5344CB8AC3E}">
+        <p14:creationId xmlns:p14="http://schemas.microsoft.com/office/powerpoint/2010/main" val="3308118012"/>
+      </p:ext>
+    </p:extLst>
+  </p:cSld>
+  <p:clrMapOvr>
+    <a:masterClrMapping/>
+  </p:clrMapOvr>
+</p:sld>
+</file>
+
+<file path=ppt/slides/slide12.xml><?xml version="1.0" encoding="utf-8"?>
+<p:sld xmlns:a="http://schemas.openxmlformats.org/drawingml/2006/main" xmlns:r="http://schemas.openxmlformats.org/officeDocument/2006/relationships" xmlns:p="http://schemas.openxmlformats.org/presentationml/2006/main">
+  <p:cSld>
+    <p:spTree>
+      <p:nvGrpSpPr>
+        <p:cNvPr id="1" name=""/>
+        <p:cNvGrpSpPr/>
+        <p:nvPr/>
+      </p:nvGrpSpPr>
+      <p:grpSpPr>
+        <a:xfrm>
+          <a:off x="0" y="0"/>
+          <a:ext cx="0" cy="0"/>
+          <a:chOff x="0" y="0"/>
+          <a:chExt cx="0" cy="0"/>
+        </a:xfrm>
+      </p:grpSpPr>
+    </p:spTree>
+    <p:extLst>
+      <p:ext uri="{BB962C8B-B14F-4D97-AF65-F5344CB8AC3E}">
+        <p14:creationId xmlns:p14="http://schemas.microsoft.com/office/powerpoint/2010/main" val="1132406673"/>
+      </p:ext>
+    </p:extLst>
+  </p:cSld>
+  <p:clrMapOvr>
+    <a:masterClrMapping/>
+  </p:clrMapOvr>
+</p:sld>
+</file>
+
 <file path=ppt/slides/slide2.xml><?xml version="1.0" encoding="utf-8"?>
 <p:sld xmlns:a="http://schemas.openxmlformats.org/drawingml/2006/main" xmlns:r="http://schemas.openxmlformats.org/officeDocument/2006/relationships" xmlns:p="http://schemas.openxmlformats.org/presentationml/2006/main">
   <p:cSld>
@@ -4095,6 +4266,88 @@
           <a:chExt cx="0" cy="0"/>
         </a:xfrm>
       </p:grpSpPr>
+      <p:pic>
+        <p:nvPicPr>
+          <p:cNvPr id="3" name="Image 2">
+            <a:extLst>
+              <a:ext uri="{FF2B5EF4-FFF2-40B4-BE49-F238E27FC236}">
+                <a16:creationId xmlns:a16="http://schemas.microsoft.com/office/drawing/2014/main" id="{10A2C6D3-9215-44A3-8804-EB3C51DA122C}"/>
+              </a:ext>
+            </a:extLst>
+          </p:cNvPr>
+          <p:cNvPicPr>
+            <a:picLocks noChangeAspect="1"/>
+          </p:cNvPicPr>
+          <p:nvPr/>
+        </p:nvPicPr>
+        <p:blipFill>
+          <a:blip r:embed="rId2"/>
+          <a:stretch>
+            <a:fillRect/>
+          </a:stretch>
+        </p:blipFill>
+        <p:spPr>
+          <a:xfrm>
+            <a:off x="0" y="0"/>
+            <a:ext cx="9144000" cy="5143500"/>
+          </a:xfrm>
+          <a:prstGeom prst="rect">
+            <a:avLst/>
+          </a:prstGeom>
+        </p:spPr>
+      </p:pic>
+      <p:sp>
+        <p:nvSpPr>
+          <p:cNvPr id="4" name="Rectangle 3">
+            <a:extLst>
+              <a:ext uri="{FF2B5EF4-FFF2-40B4-BE49-F238E27FC236}">
+                <a16:creationId xmlns:a16="http://schemas.microsoft.com/office/drawing/2014/main" id="{024A2E12-C38E-49C7-9F6D-EA4D81D60A54}"/>
+              </a:ext>
+            </a:extLst>
+          </p:cNvPr>
+          <p:cNvSpPr/>
+          <p:nvPr/>
+        </p:nvSpPr>
+        <p:spPr>
+          <a:xfrm>
+            <a:off x="7749996" y="340468"/>
+            <a:ext cx="1126494" cy="243686"/>
+          </a:xfrm>
+          <a:prstGeom prst="rect">
+            <a:avLst/>
+          </a:prstGeom>
+          <a:solidFill>
+            <a:srgbClr val="051631"/>
+          </a:solidFill>
+          <a:ln>
+            <a:noFill/>
+          </a:ln>
+        </p:spPr>
+        <p:style>
+          <a:lnRef idx="2">
+            <a:schemeClr val="accent1">
+              <a:shade val="50000"/>
+            </a:schemeClr>
+          </a:lnRef>
+          <a:fillRef idx="1">
+            <a:schemeClr val="accent1"/>
+          </a:fillRef>
+          <a:effectRef idx="0">
+            <a:schemeClr val="accent1"/>
+          </a:effectRef>
+          <a:fontRef idx="minor">
+            <a:schemeClr val="lt1"/>
+          </a:fontRef>
+        </p:style>
+        <p:txBody>
+          <a:bodyPr rtlCol="0" anchor="ctr"/>
+          <a:lstStyle/>
+          <a:p>
+            <a:pPr algn="ctr"/>
+            <a:endParaRPr lang="en-US"/>
+          </a:p>
+        </p:txBody>
+      </p:sp>
     </p:spTree>
     <p:extLst>
       <p:ext uri="{BB962C8B-B14F-4D97-AF65-F5344CB8AC3E}">
@@ -4125,10 +4378,1201 @@
           <a:chExt cx="0" cy="0"/>
         </a:xfrm>
       </p:grpSpPr>
+      <p:pic>
+        <p:nvPicPr>
+          <p:cNvPr id="2" name="Image 1">
+            <a:extLst>
+              <a:ext uri="{FF2B5EF4-FFF2-40B4-BE49-F238E27FC236}">
+                <a16:creationId xmlns:a16="http://schemas.microsoft.com/office/drawing/2014/main" id="{43CCEC33-3D91-4C36-8EDA-11EE5B2FCA7E}"/>
+              </a:ext>
+            </a:extLst>
+          </p:cNvPr>
+          <p:cNvPicPr>
+            <a:picLocks noChangeAspect="1"/>
+          </p:cNvPicPr>
+          <p:nvPr/>
+        </p:nvPicPr>
+        <p:blipFill>
+          <a:blip r:embed="rId2"/>
+          <a:stretch>
+            <a:fillRect/>
+          </a:stretch>
+        </p:blipFill>
+        <p:spPr>
+          <a:xfrm>
+            <a:off x="1721210" y="754648"/>
+            <a:ext cx="5488317" cy="3534444"/>
+          </a:xfrm>
+          <a:prstGeom prst="rect">
+            <a:avLst/>
+          </a:prstGeom>
+        </p:spPr>
+      </p:pic>
+    </p:spTree>
+    <p:extLst>
+      <p:ext uri="{BB962C8B-B14F-4D97-AF65-F5344CB8AC3E}">
+        <p14:creationId xmlns:p14="http://schemas.microsoft.com/office/powerpoint/2010/main" val="4069018019"/>
+      </p:ext>
+    </p:extLst>
+  </p:cSld>
+  <p:clrMapOvr>
+    <a:masterClrMapping/>
+  </p:clrMapOvr>
+</p:sld>
+</file>
+
+<file path=ppt/slides/slide4.xml><?xml version="1.0" encoding="utf-8"?>
+<p:sld xmlns:a="http://schemas.openxmlformats.org/drawingml/2006/main" xmlns:r="http://schemas.openxmlformats.org/officeDocument/2006/relationships" xmlns:p="http://schemas.openxmlformats.org/presentationml/2006/main">
+  <p:cSld>
+    <p:spTree>
+      <p:nvGrpSpPr>
+        <p:cNvPr id="1" name=""/>
+        <p:cNvGrpSpPr/>
+        <p:nvPr/>
+      </p:nvGrpSpPr>
+      <p:grpSpPr>
+        <a:xfrm>
+          <a:off x="0" y="0"/>
+          <a:ext cx="0" cy="0"/>
+          <a:chOff x="0" y="0"/>
+          <a:chExt cx="0" cy="0"/>
+        </a:xfrm>
+      </p:grpSpPr>
+      <p:pic>
+        <p:nvPicPr>
+          <p:cNvPr id="2" name="Image 1">
+            <a:extLst>
+              <a:ext uri="{FF2B5EF4-FFF2-40B4-BE49-F238E27FC236}">
+                <a16:creationId xmlns:a16="http://schemas.microsoft.com/office/drawing/2014/main" id="{209DFEFA-A27F-497F-A039-3F0B67EC4698}"/>
+              </a:ext>
+            </a:extLst>
+          </p:cNvPr>
+          <p:cNvPicPr>
+            <a:picLocks noChangeAspect="1"/>
+          </p:cNvPicPr>
+          <p:nvPr/>
+        </p:nvPicPr>
+        <p:blipFill>
+          <a:blip r:embed="rId2"/>
+          <a:stretch>
+            <a:fillRect/>
+          </a:stretch>
+        </p:blipFill>
+        <p:spPr>
+          <a:xfrm>
+            <a:off x="1829696" y="1066250"/>
+            <a:ext cx="5484607" cy="2904570"/>
+          </a:xfrm>
+          <a:prstGeom prst="rect">
+            <a:avLst/>
+          </a:prstGeom>
+        </p:spPr>
+      </p:pic>
     </p:spTree>
     <p:extLst>
       <p:ext uri="{BB962C8B-B14F-4D97-AF65-F5344CB8AC3E}">
         <p14:creationId xmlns:p14="http://schemas.microsoft.com/office/powerpoint/2010/main" val="4242187192"/>
+      </p:ext>
+    </p:extLst>
+  </p:cSld>
+  <p:clrMapOvr>
+    <a:masterClrMapping/>
+  </p:clrMapOvr>
+</p:sld>
+</file>
+
+<file path=ppt/slides/slide5.xml><?xml version="1.0" encoding="utf-8"?>
+<p:sld xmlns:a="http://schemas.openxmlformats.org/drawingml/2006/main" xmlns:r="http://schemas.openxmlformats.org/officeDocument/2006/relationships" xmlns:p="http://schemas.openxmlformats.org/presentationml/2006/main">
+  <p:cSld>
+    <p:spTree>
+      <p:nvGrpSpPr>
+        <p:cNvPr id="1" name=""/>
+        <p:cNvGrpSpPr/>
+        <p:nvPr/>
+      </p:nvGrpSpPr>
+      <p:grpSpPr>
+        <a:xfrm>
+          <a:off x="0" y="0"/>
+          <a:ext cx="0" cy="0"/>
+          <a:chOff x="0" y="0"/>
+          <a:chExt cx="0" cy="0"/>
+        </a:xfrm>
+      </p:grpSpPr>
+      <p:pic>
+        <p:nvPicPr>
+          <p:cNvPr id="2" name="Image 1">
+            <a:extLst>
+              <a:ext uri="{FF2B5EF4-FFF2-40B4-BE49-F238E27FC236}">
+                <a16:creationId xmlns:a16="http://schemas.microsoft.com/office/drawing/2014/main" id="{0C94C63F-300A-495E-BF70-B05A2BC9FB0D}"/>
+              </a:ext>
+            </a:extLst>
+          </p:cNvPr>
+          <p:cNvPicPr>
+            <a:picLocks noChangeAspect="1"/>
+          </p:cNvPicPr>
+          <p:nvPr/>
+        </p:nvPicPr>
+        <p:blipFill>
+          <a:blip r:embed="rId2"/>
+          <a:stretch>
+            <a:fillRect/>
+          </a:stretch>
+        </p:blipFill>
+        <p:spPr>
+          <a:xfrm>
+            <a:off x="1701652" y="1247707"/>
+            <a:ext cx="5947152" cy="2743321"/>
+          </a:xfrm>
+          <a:prstGeom prst="rect">
+            <a:avLst/>
+          </a:prstGeom>
+        </p:spPr>
+      </p:pic>
+    </p:spTree>
+    <p:extLst>
+      <p:ext uri="{BB962C8B-B14F-4D97-AF65-F5344CB8AC3E}">
+        <p14:creationId xmlns:p14="http://schemas.microsoft.com/office/powerpoint/2010/main" val="425003759"/>
+      </p:ext>
+    </p:extLst>
+  </p:cSld>
+  <p:clrMapOvr>
+    <a:masterClrMapping/>
+  </p:clrMapOvr>
+</p:sld>
+</file>
+
+<file path=ppt/slides/slide6.xml><?xml version="1.0" encoding="utf-8"?>
+<p:sld xmlns:a="http://schemas.openxmlformats.org/drawingml/2006/main" xmlns:r="http://schemas.openxmlformats.org/officeDocument/2006/relationships" xmlns:p="http://schemas.openxmlformats.org/presentationml/2006/main">
+  <p:cSld>
+    <p:spTree>
+      <p:nvGrpSpPr>
+        <p:cNvPr id="1" name=""/>
+        <p:cNvGrpSpPr/>
+        <p:nvPr/>
+      </p:nvGrpSpPr>
+      <p:grpSpPr>
+        <a:xfrm>
+          <a:off x="0" y="0"/>
+          <a:ext cx="0" cy="0"/>
+          <a:chOff x="0" y="0"/>
+          <a:chExt cx="0" cy="0"/>
+        </a:xfrm>
+      </p:grpSpPr>
+      <p:pic>
+        <p:nvPicPr>
+          <p:cNvPr id="2" name="Image 1">
+            <a:extLst>
+              <a:ext uri="{FF2B5EF4-FFF2-40B4-BE49-F238E27FC236}">
+                <a16:creationId xmlns:a16="http://schemas.microsoft.com/office/drawing/2014/main" id="{D6973006-AE6E-41E1-9EF8-B84CAC679DEB}"/>
+              </a:ext>
+            </a:extLst>
+          </p:cNvPr>
+          <p:cNvPicPr>
+            <a:picLocks noChangeAspect="1"/>
+          </p:cNvPicPr>
+          <p:nvPr/>
+        </p:nvPicPr>
+        <p:blipFill>
+          <a:blip r:embed="rId2"/>
+          <a:stretch>
+            <a:fillRect/>
+          </a:stretch>
+        </p:blipFill>
+        <p:spPr>
+          <a:xfrm>
+            <a:off x="1815958" y="1196904"/>
+            <a:ext cx="5512083" cy="2749691"/>
+          </a:xfrm>
+          <a:prstGeom prst="rect">
+            <a:avLst/>
+          </a:prstGeom>
+        </p:spPr>
+      </p:pic>
+    </p:spTree>
+    <p:extLst>
+      <p:ext uri="{BB962C8B-B14F-4D97-AF65-F5344CB8AC3E}">
+        <p14:creationId xmlns:p14="http://schemas.microsoft.com/office/powerpoint/2010/main" val="2565872102"/>
+      </p:ext>
+    </p:extLst>
+  </p:cSld>
+  <p:clrMapOvr>
+    <a:masterClrMapping/>
+  </p:clrMapOvr>
+</p:sld>
+</file>
+
+<file path=ppt/slides/slide7.xml><?xml version="1.0" encoding="utf-8"?>
+<p:sld xmlns:a="http://schemas.openxmlformats.org/drawingml/2006/main" xmlns:r="http://schemas.openxmlformats.org/officeDocument/2006/relationships" xmlns:p="http://schemas.openxmlformats.org/presentationml/2006/main">
+  <p:cSld>
+    <p:spTree>
+      <p:nvGrpSpPr>
+        <p:cNvPr id="1" name=""/>
+        <p:cNvGrpSpPr/>
+        <p:nvPr/>
+      </p:nvGrpSpPr>
+      <p:grpSpPr>
+        <a:xfrm>
+          <a:off x="0" y="0"/>
+          <a:ext cx="0" cy="0"/>
+          <a:chOff x="0" y="0"/>
+          <a:chExt cx="0" cy="0"/>
+        </a:xfrm>
+      </p:grpSpPr>
+      <p:sp>
+        <p:nvSpPr>
+          <p:cNvPr id="2" name="Rectangle 1">
+            <a:extLst>
+              <a:ext uri="{FF2B5EF4-FFF2-40B4-BE49-F238E27FC236}">
+                <a16:creationId xmlns:a16="http://schemas.microsoft.com/office/drawing/2014/main" id="{8C7B065B-047E-4AFC-AC15-932603757556}"/>
+              </a:ext>
+            </a:extLst>
+          </p:cNvPr>
+          <p:cNvSpPr/>
+          <p:nvPr/>
+        </p:nvSpPr>
+        <p:spPr>
+          <a:xfrm>
+            <a:off x="452147" y="455149"/>
+            <a:ext cx="6029483" cy="400110"/>
+          </a:xfrm>
+          <a:prstGeom prst="rect">
+            <a:avLst/>
+          </a:prstGeom>
+        </p:spPr>
+        <p:txBody>
+          <a:bodyPr wrap="square">
+            <a:spAutoFit/>
+          </a:bodyPr>
+          <a:lstStyle/>
+          <a:p>
+            <a:r>
+              <a:rPr lang="en-US" sz="2000" dirty="0">
+                <a:effectLst>
+                  <a:outerShdw blurRad="38100" dist="38100" dir="2700000" algn="tl">
+                    <a:srgbClr val="000000">
+                      <a:alpha val="43137"/>
+                    </a:srgbClr>
+                  </a:outerShdw>
+                </a:effectLst>
+              </a:rPr>
+              <a:t>1. What is Object-Oriented Programming (OOP)?</a:t>
+            </a:r>
+          </a:p>
+        </p:txBody>
+      </p:sp>
+      <p:sp>
+        <p:nvSpPr>
+          <p:cNvPr id="3" name="Rectangle 2">
+            <a:extLst>
+              <a:ext uri="{FF2B5EF4-FFF2-40B4-BE49-F238E27FC236}">
+                <a16:creationId xmlns:a16="http://schemas.microsoft.com/office/drawing/2014/main" id="{082A62C1-DCF1-46F4-BB8F-316D87C93A14}"/>
+              </a:ext>
+            </a:extLst>
+          </p:cNvPr>
+          <p:cNvSpPr/>
+          <p:nvPr/>
+        </p:nvSpPr>
+        <p:spPr>
+          <a:xfrm>
+            <a:off x="1048276" y="1030303"/>
+            <a:ext cx="6858000" cy="2031325"/>
+          </a:xfrm>
+          <a:prstGeom prst="rect">
+            <a:avLst/>
+          </a:prstGeom>
+        </p:spPr>
+        <p:txBody>
+          <a:bodyPr wrap="square">
+            <a:spAutoFit/>
+          </a:bodyPr>
+          <a:lstStyle/>
+          <a:p>
+            <a:r>
+              <a:rPr lang="en-US" dirty="0"/>
+              <a:t>Object-Oriented Programming (OOP) is a programming </a:t>
+            </a:r>
+            <a:r>
+              <a:rPr lang="en-US" b="1" dirty="0"/>
+              <a:t>paradigm</a:t>
+            </a:r>
+            <a:r>
+              <a:rPr lang="en-US" dirty="0"/>
+              <a:t> that organizes software around </a:t>
+            </a:r>
+            <a:r>
+              <a:rPr lang="en-US" b="1" dirty="0"/>
+              <a:t>objects</a:t>
+            </a:r>
+            <a:r>
+              <a:rPr lang="en-US" dirty="0"/>
+              <a:t> rather than functions.</a:t>
+            </a:r>
+          </a:p>
+          <a:p>
+            <a:r>
+              <a:rPr lang="en-US" dirty="0"/>
+              <a:t>An object represents a real-world entity that contains:</a:t>
+            </a:r>
+          </a:p>
+          <a:p>
+            <a:pPr>
+              <a:buFont typeface="Arial" panose="020B0604020202020204" pitchFamily="34" charset="0"/>
+              <a:buChar char="•"/>
+            </a:pPr>
+            <a:r>
+              <a:rPr lang="en-US" b="1" dirty="0"/>
+              <a:t>Data (Attributes)</a:t>
+            </a:r>
+            <a:r>
+              <a:rPr lang="en-US" dirty="0"/>
+              <a:t> → Information about the object. </a:t>
+            </a:r>
+          </a:p>
+          <a:p>
+            <a:pPr>
+              <a:buFont typeface="Arial" panose="020B0604020202020204" pitchFamily="34" charset="0"/>
+              <a:buChar char="•"/>
+            </a:pPr>
+            <a:r>
+              <a:rPr lang="en-US" b="1" dirty="0"/>
+              <a:t>Behavior (Methods)</a:t>
+            </a:r>
+            <a:r>
+              <a:rPr lang="en-US" dirty="0"/>
+              <a:t> → Actions the object can perform. </a:t>
+            </a:r>
+          </a:p>
+          <a:p>
+            <a:r>
+              <a:rPr lang="en-US" dirty="0"/>
+              <a:t>Instead of writing a program as a sequence of functions, OOP models the program as a collection of interacting objects.</a:t>
+            </a:r>
+          </a:p>
+        </p:txBody>
+      </p:sp>
+    </p:spTree>
+    <p:extLst>
+      <p:ext uri="{BB962C8B-B14F-4D97-AF65-F5344CB8AC3E}">
+        <p14:creationId xmlns:p14="http://schemas.microsoft.com/office/powerpoint/2010/main" val="3999617203"/>
+      </p:ext>
+    </p:extLst>
+  </p:cSld>
+  <p:clrMapOvr>
+    <a:masterClrMapping/>
+  </p:clrMapOvr>
+</p:sld>
+</file>
+
+<file path=ppt/slides/slide8.xml><?xml version="1.0" encoding="utf-8"?>
+<p:sld xmlns:a="http://schemas.openxmlformats.org/drawingml/2006/main" xmlns:r="http://schemas.openxmlformats.org/officeDocument/2006/relationships" xmlns:p="http://schemas.openxmlformats.org/presentationml/2006/main">
+  <p:cSld>
+    <p:spTree>
+      <p:nvGrpSpPr>
+        <p:cNvPr id="1" name=""/>
+        <p:cNvGrpSpPr/>
+        <p:nvPr/>
+      </p:nvGrpSpPr>
+      <p:grpSpPr>
+        <a:xfrm>
+          <a:off x="0" y="0"/>
+          <a:ext cx="0" cy="0"/>
+          <a:chOff x="0" y="0"/>
+          <a:chExt cx="0" cy="0"/>
+        </a:xfrm>
+      </p:grpSpPr>
+      <p:sp>
+        <p:nvSpPr>
+          <p:cNvPr id="3" name="Rectangle 2">
+            <a:extLst>
+              <a:ext uri="{FF2B5EF4-FFF2-40B4-BE49-F238E27FC236}">
+                <a16:creationId xmlns:a16="http://schemas.microsoft.com/office/drawing/2014/main" id="{0DF50BCD-7141-4062-BDCF-F92A6A469DD8}"/>
+              </a:ext>
+            </a:extLst>
+          </p:cNvPr>
+          <p:cNvSpPr>
+            <a:spLocks noChangeArrowheads="1"/>
+          </p:cNvSpPr>
+          <p:nvPr/>
+        </p:nvSpPr>
+        <p:spPr bwMode="auto">
+          <a:xfrm>
+            <a:off x="373843" y="476183"/>
+            <a:ext cx="8176918" cy="4093428"/>
+          </a:xfrm>
+          <a:prstGeom prst="rect">
+            <a:avLst/>
+          </a:prstGeom>
+          <a:noFill/>
+          <a:ln>
+            <a:noFill/>
+          </a:ln>
+          <a:effectLst/>
+          <a:extLst>
+            <a:ext uri="{909E8E84-426E-40DD-AFC4-6F175D3DCCD1}">
+              <a14:hiddenFill xmlns:a14="http://schemas.microsoft.com/office/drawing/2010/main">
+                <a:solidFill>
+                  <a:schemeClr val="accent1"/>
+                </a:solidFill>
+              </a14:hiddenFill>
+            </a:ext>
+            <a:ext uri="{91240B29-F687-4F45-9708-019B960494DF}">
+              <a14:hiddenLine xmlns:a14="http://schemas.microsoft.com/office/drawing/2010/main" w="9525">
+                <a:solidFill>
+                  <a:schemeClr val="tx1"/>
+                </a:solidFill>
+                <a:miter lim="800000"/>
+                <a:headEnd/>
+                <a:tailEnd/>
+              </a14:hiddenLine>
+            </a:ext>
+            <a:ext uri="{AF507438-7753-43E0-B8FC-AC1667EBCBE1}">
+              <a14:hiddenEffects xmlns:a14="http://schemas.microsoft.com/office/drawing/2010/main">
+                <a:effectLst>
+                  <a:outerShdw dist="35921" dir="2700000" algn="ctr" rotWithShape="0">
+                    <a:schemeClr val="bg2"/>
+                  </a:outerShdw>
+                </a:effectLst>
+              </a14:hiddenEffects>
+            </a:ext>
+          </a:extLst>
+        </p:spPr>
+        <p:txBody>
+          <a:bodyPr vert="horz" wrap="none" lIns="91440" tIns="45720" rIns="91440" bIns="45720" numCol="1" anchor="ctr" anchorCtr="0" compatLnSpc="1">
+            <a:prstTxWarp prst="textNoShape">
+              <a:avLst/>
+            </a:prstTxWarp>
+            <a:spAutoFit/>
+          </a:bodyPr>
+          <a:lstStyle/>
+          <a:p>
+            <a:pPr marL="0" marR="0" lvl="0" indent="0" algn="l" defTabSz="914400" rtl="0" eaLnBrk="0" fontAlgn="base" latinLnBrk="0" hangingPunct="0">
+              <a:lnSpc>
+                <a:spcPct val="100000"/>
+              </a:lnSpc>
+              <a:spcBef>
+                <a:spcPct val="0"/>
+              </a:spcBef>
+              <a:spcAft>
+                <a:spcPct val="0"/>
+              </a:spcAft>
+              <a:buClrTx/>
+              <a:buSzTx/>
+              <a:buFontTx/>
+              <a:buNone/>
+              <a:tabLst/>
+            </a:pPr>
+            <a:r>
+              <a:rPr kumimoji="0" lang="en-US" altLang="en-US" b="1" i="0" u="none" strike="noStrike" cap="none" normalizeH="0" baseline="0" dirty="0">
+                <a:ln>
+                  <a:noFill/>
+                </a:ln>
+                <a:solidFill>
+                  <a:schemeClr val="tx1"/>
+                </a:solidFill>
+                <a:effectLst/>
+                <a:latin typeface="Arial" panose="020B0604020202020204" pitchFamily="34" charset="0"/>
+              </a:rPr>
+              <a:t>2. Why OOP?</a:t>
+            </a:r>
+          </a:p>
+          <a:p>
+            <a:pPr marL="0" marR="0" lvl="0" indent="0" algn="l" defTabSz="914400" rtl="0" eaLnBrk="0" fontAlgn="base" latinLnBrk="0" hangingPunct="0">
+              <a:lnSpc>
+                <a:spcPct val="100000"/>
+              </a:lnSpc>
+              <a:spcBef>
+                <a:spcPct val="0"/>
+              </a:spcBef>
+              <a:spcAft>
+                <a:spcPct val="0"/>
+              </a:spcAft>
+              <a:buClrTx/>
+              <a:buSzTx/>
+              <a:buFontTx/>
+              <a:buNone/>
+              <a:tabLst/>
+            </a:pPr>
+            <a:r>
+              <a:rPr kumimoji="0" lang="en-US" altLang="en-US" sz="1400" b="0" i="0" u="none" strike="noStrike" cap="none" normalizeH="0" baseline="0" dirty="0">
+                <a:ln>
+                  <a:noFill/>
+                </a:ln>
+                <a:solidFill>
+                  <a:schemeClr val="tx1"/>
+                </a:solidFill>
+                <a:effectLst/>
+                <a:latin typeface="Arial" panose="020B0604020202020204" pitchFamily="34" charset="0"/>
+              </a:rPr>
+              <a:t>As programs become larger, procedural programming becomes difficult to </a:t>
+            </a:r>
+            <a:r>
+              <a:rPr kumimoji="0" lang="en-US" altLang="en-US" sz="1400" b="0" i="0" u="none" strike="noStrike" cap="none" normalizeH="0" baseline="0" dirty="0" err="1">
+                <a:ln>
+                  <a:noFill/>
+                </a:ln>
+                <a:solidFill>
+                  <a:schemeClr val="tx1"/>
+                </a:solidFill>
+                <a:effectLst/>
+                <a:latin typeface="Arial" panose="020B0604020202020204" pitchFamily="34" charset="0"/>
+              </a:rPr>
+              <a:t>manage.Problems</a:t>
+            </a:r>
+            <a:r>
+              <a:rPr kumimoji="0" lang="en-US" altLang="en-US" sz="1400" b="0" i="0" u="none" strike="noStrike" cap="none" normalizeH="0" baseline="0" dirty="0">
+                <a:ln>
+                  <a:noFill/>
+                </a:ln>
+                <a:solidFill>
+                  <a:schemeClr val="tx1"/>
+                </a:solidFill>
+                <a:effectLst/>
+                <a:latin typeface="Arial" panose="020B0604020202020204" pitchFamily="34" charset="0"/>
+              </a:rPr>
+              <a:t> include:</a:t>
+            </a:r>
+          </a:p>
+          <a:p>
+            <a:pPr lvl="1" eaLnBrk="0" fontAlgn="base" hangingPunct="0">
+              <a:spcBef>
+                <a:spcPct val="0"/>
+              </a:spcBef>
+              <a:spcAft>
+                <a:spcPct val="0"/>
+              </a:spcAft>
+              <a:buFontTx/>
+              <a:buChar char="•"/>
+            </a:pPr>
+            <a:r>
+              <a:rPr kumimoji="0" lang="en-US" altLang="en-US" sz="1400" b="0" i="0" u="none" strike="noStrike" cap="none" normalizeH="0" baseline="0" dirty="0">
+                <a:ln>
+                  <a:noFill/>
+                </a:ln>
+                <a:solidFill>
+                  <a:schemeClr val="tx1"/>
+                </a:solidFill>
+                <a:effectLst/>
+                <a:latin typeface="Arial" panose="020B0604020202020204" pitchFamily="34" charset="0"/>
+              </a:rPr>
+              <a:t>Repeated code </a:t>
+            </a:r>
+          </a:p>
+          <a:p>
+            <a:pPr lvl="1" eaLnBrk="0" fontAlgn="base" hangingPunct="0">
+              <a:spcBef>
+                <a:spcPct val="0"/>
+              </a:spcBef>
+              <a:spcAft>
+                <a:spcPct val="0"/>
+              </a:spcAft>
+              <a:buFontTx/>
+              <a:buChar char="•"/>
+            </a:pPr>
+            <a:r>
+              <a:rPr kumimoji="0" lang="en-US" altLang="en-US" sz="1400" b="0" i="0" u="none" strike="noStrike" cap="none" normalizeH="0" baseline="0" dirty="0">
+                <a:ln>
+                  <a:noFill/>
+                </a:ln>
+                <a:solidFill>
+                  <a:schemeClr val="tx1"/>
+                </a:solidFill>
+                <a:effectLst/>
+                <a:latin typeface="Arial" panose="020B0604020202020204" pitchFamily="34" charset="0"/>
+              </a:rPr>
+              <a:t>Difficult maintenance </a:t>
+            </a:r>
+          </a:p>
+          <a:p>
+            <a:pPr lvl="1" eaLnBrk="0" fontAlgn="base" hangingPunct="0">
+              <a:spcBef>
+                <a:spcPct val="0"/>
+              </a:spcBef>
+              <a:spcAft>
+                <a:spcPct val="0"/>
+              </a:spcAft>
+              <a:buFontTx/>
+              <a:buChar char="•"/>
+            </a:pPr>
+            <a:r>
+              <a:rPr kumimoji="0" lang="en-US" altLang="en-US" sz="1400" b="0" i="0" u="none" strike="noStrike" cap="none" normalizeH="0" baseline="0" dirty="0">
+                <a:ln>
+                  <a:noFill/>
+                </a:ln>
+                <a:solidFill>
+                  <a:schemeClr val="tx1"/>
+                </a:solidFill>
+                <a:effectLst/>
+                <a:latin typeface="Arial" panose="020B0604020202020204" pitchFamily="34" charset="0"/>
+              </a:rPr>
+              <a:t>Difficult debugging </a:t>
+            </a:r>
+          </a:p>
+          <a:p>
+            <a:pPr lvl="1" eaLnBrk="0" fontAlgn="base" hangingPunct="0">
+              <a:spcBef>
+                <a:spcPct val="0"/>
+              </a:spcBef>
+              <a:spcAft>
+                <a:spcPct val="0"/>
+              </a:spcAft>
+              <a:buFontTx/>
+              <a:buChar char="•"/>
+            </a:pPr>
+            <a:r>
+              <a:rPr kumimoji="0" lang="en-US" altLang="en-US" sz="1400" b="0" i="0" u="none" strike="noStrike" cap="none" normalizeH="0" baseline="0" dirty="0">
+                <a:ln>
+                  <a:noFill/>
+                </a:ln>
+                <a:solidFill>
+                  <a:schemeClr val="tx1"/>
+                </a:solidFill>
+                <a:effectLst/>
+                <a:latin typeface="Arial" panose="020B0604020202020204" pitchFamily="34" charset="0"/>
+              </a:rPr>
+              <a:t>Poor organization </a:t>
+            </a:r>
+          </a:p>
+          <a:p>
+            <a:pPr lvl="1" eaLnBrk="0" fontAlgn="base" hangingPunct="0">
+              <a:spcBef>
+                <a:spcPct val="0"/>
+              </a:spcBef>
+              <a:spcAft>
+                <a:spcPct val="0"/>
+              </a:spcAft>
+              <a:buFontTx/>
+              <a:buChar char="•"/>
+            </a:pPr>
+            <a:r>
+              <a:rPr kumimoji="0" lang="en-US" altLang="en-US" sz="1400" b="0" i="0" u="none" strike="noStrike" cap="none" normalizeH="0" baseline="0" dirty="0">
+                <a:ln>
+                  <a:noFill/>
+                </a:ln>
+                <a:solidFill>
+                  <a:schemeClr val="tx1"/>
+                </a:solidFill>
+                <a:effectLst/>
+                <a:latin typeface="Arial" panose="020B0604020202020204" pitchFamily="34" charset="0"/>
+              </a:rPr>
+              <a:t>Low code reusability </a:t>
+            </a:r>
+          </a:p>
+          <a:p>
+            <a:pPr marL="0" marR="0" lvl="0" indent="0" algn="l" defTabSz="914400" rtl="0" eaLnBrk="0" fontAlgn="base" latinLnBrk="0" hangingPunct="0">
+              <a:lnSpc>
+                <a:spcPct val="100000"/>
+              </a:lnSpc>
+              <a:spcBef>
+                <a:spcPct val="0"/>
+              </a:spcBef>
+              <a:spcAft>
+                <a:spcPct val="0"/>
+              </a:spcAft>
+              <a:buClrTx/>
+              <a:buSzTx/>
+              <a:buFontTx/>
+              <a:buNone/>
+              <a:tabLst/>
+            </a:pPr>
+            <a:endParaRPr kumimoji="0" lang="en-US" altLang="en-US" sz="1400" b="1" i="0" u="none" strike="noStrike" cap="none" normalizeH="0" baseline="0" dirty="0">
+              <a:ln>
+                <a:noFill/>
+              </a:ln>
+              <a:solidFill>
+                <a:schemeClr val="tx1"/>
+              </a:solidFill>
+              <a:effectLst/>
+              <a:latin typeface="Arial" panose="020B0604020202020204" pitchFamily="34" charset="0"/>
+            </a:endParaRPr>
+          </a:p>
+          <a:p>
+            <a:pPr eaLnBrk="0" fontAlgn="base" hangingPunct="0">
+              <a:spcBef>
+                <a:spcPct val="0"/>
+              </a:spcBef>
+              <a:spcAft>
+                <a:spcPct val="0"/>
+              </a:spcAft>
+            </a:pPr>
+            <a:r>
+              <a:rPr lang="en-US" altLang="en-US" sz="1400" dirty="0">
+                <a:latin typeface="Arial" panose="020B0604020202020204" pitchFamily="34" charset="0"/>
+              </a:rPr>
+              <a:t>OOP solves these problems by organizing code into reusable objects.</a:t>
+            </a:r>
+            <a:endParaRPr lang="en-US" altLang="en-US" sz="1400" b="1" dirty="0">
+              <a:latin typeface="Arial" panose="020B0604020202020204" pitchFamily="34" charset="0"/>
+            </a:endParaRPr>
+          </a:p>
+          <a:p>
+            <a:pPr marL="0" marR="0" lvl="0" indent="0" algn="l" defTabSz="914400" rtl="0" eaLnBrk="0" fontAlgn="base" latinLnBrk="0" hangingPunct="0">
+              <a:lnSpc>
+                <a:spcPct val="100000"/>
+              </a:lnSpc>
+              <a:spcBef>
+                <a:spcPct val="0"/>
+              </a:spcBef>
+              <a:spcAft>
+                <a:spcPct val="0"/>
+              </a:spcAft>
+              <a:buClrTx/>
+              <a:buSzTx/>
+              <a:buFontTx/>
+              <a:buNone/>
+              <a:tabLst/>
+            </a:pPr>
+            <a:endParaRPr kumimoji="0" lang="en-US" altLang="en-US" sz="1400" b="1" i="0" u="none" strike="noStrike" cap="none" normalizeH="0" baseline="0" dirty="0">
+              <a:ln>
+                <a:noFill/>
+              </a:ln>
+              <a:solidFill>
+                <a:schemeClr val="tx1"/>
+              </a:solidFill>
+              <a:effectLst/>
+              <a:latin typeface="Arial" panose="020B0604020202020204" pitchFamily="34" charset="0"/>
+            </a:endParaRPr>
+          </a:p>
+          <a:p>
+            <a:pPr marL="0" marR="0" lvl="0" indent="0" algn="l" defTabSz="914400" rtl="0" eaLnBrk="0" fontAlgn="base" latinLnBrk="0" hangingPunct="0">
+              <a:lnSpc>
+                <a:spcPct val="100000"/>
+              </a:lnSpc>
+              <a:spcBef>
+                <a:spcPct val="0"/>
+              </a:spcBef>
+              <a:spcAft>
+                <a:spcPct val="0"/>
+              </a:spcAft>
+              <a:buClrTx/>
+              <a:buSzTx/>
+              <a:buFontTx/>
+              <a:buNone/>
+              <a:tabLst/>
+            </a:pPr>
+            <a:r>
+              <a:rPr kumimoji="0" lang="en-US" altLang="en-US" sz="1400" b="1" i="0" u="none" strike="noStrike" cap="none" normalizeH="0" baseline="0" dirty="0">
+                <a:ln>
+                  <a:noFill/>
+                </a:ln>
+                <a:solidFill>
+                  <a:schemeClr val="tx1"/>
+                </a:solidFill>
+                <a:effectLst/>
+                <a:latin typeface="Arial" panose="020B0604020202020204" pitchFamily="34" charset="0"/>
+              </a:rPr>
+              <a:t>Benefits</a:t>
+            </a:r>
+          </a:p>
+          <a:p>
+            <a:pPr lvl="1" eaLnBrk="0" fontAlgn="base" hangingPunct="0">
+              <a:spcBef>
+                <a:spcPct val="0"/>
+              </a:spcBef>
+              <a:spcAft>
+                <a:spcPct val="0"/>
+              </a:spcAft>
+              <a:buFontTx/>
+              <a:buChar char="•"/>
+            </a:pPr>
+            <a:r>
+              <a:rPr kumimoji="0" lang="en-US" altLang="en-US" sz="1400" b="0" i="0" u="none" strike="noStrike" cap="none" normalizeH="0" baseline="0" dirty="0">
+                <a:ln>
+                  <a:noFill/>
+                </a:ln>
+                <a:solidFill>
+                  <a:schemeClr val="tx1"/>
+                </a:solidFill>
+                <a:effectLst/>
+                <a:latin typeface="Arial" panose="020B0604020202020204" pitchFamily="34" charset="0"/>
+              </a:rPr>
+              <a:t>Better organization </a:t>
+            </a:r>
+          </a:p>
+          <a:p>
+            <a:pPr lvl="1" eaLnBrk="0" fontAlgn="base" hangingPunct="0">
+              <a:spcBef>
+                <a:spcPct val="0"/>
+              </a:spcBef>
+              <a:spcAft>
+                <a:spcPct val="0"/>
+              </a:spcAft>
+              <a:buFontTx/>
+              <a:buChar char="•"/>
+            </a:pPr>
+            <a:r>
+              <a:rPr kumimoji="0" lang="en-US" altLang="en-US" sz="1400" b="0" i="0" u="none" strike="noStrike" cap="none" normalizeH="0" baseline="0" dirty="0">
+                <a:ln>
+                  <a:noFill/>
+                </a:ln>
+                <a:solidFill>
+                  <a:schemeClr val="tx1"/>
+                </a:solidFill>
+                <a:effectLst/>
+                <a:latin typeface="Arial" panose="020B0604020202020204" pitchFamily="34" charset="0"/>
+              </a:rPr>
+              <a:t>Easier maintenance </a:t>
+            </a:r>
+          </a:p>
+          <a:p>
+            <a:pPr lvl="1" eaLnBrk="0" fontAlgn="base" hangingPunct="0">
+              <a:spcBef>
+                <a:spcPct val="0"/>
+              </a:spcBef>
+              <a:spcAft>
+                <a:spcPct val="0"/>
+              </a:spcAft>
+              <a:buFontTx/>
+              <a:buChar char="•"/>
+            </a:pPr>
+            <a:r>
+              <a:rPr kumimoji="0" lang="en-US" altLang="en-US" sz="1400" b="0" i="0" u="none" strike="noStrike" cap="none" normalizeH="0" baseline="0" dirty="0">
+                <a:ln>
+                  <a:noFill/>
+                </a:ln>
+                <a:solidFill>
+                  <a:schemeClr val="tx1"/>
+                </a:solidFill>
+                <a:effectLst/>
+                <a:latin typeface="Arial" panose="020B0604020202020204" pitchFamily="34" charset="0"/>
+              </a:rPr>
+              <a:t>Code reuse </a:t>
+            </a:r>
+          </a:p>
+          <a:p>
+            <a:pPr lvl="1" eaLnBrk="0" fontAlgn="base" hangingPunct="0">
+              <a:spcBef>
+                <a:spcPct val="0"/>
+              </a:spcBef>
+              <a:spcAft>
+                <a:spcPct val="0"/>
+              </a:spcAft>
+              <a:buFontTx/>
+              <a:buChar char="•"/>
+            </a:pPr>
+            <a:r>
+              <a:rPr kumimoji="0" lang="en-US" altLang="en-US" sz="1400" b="0" i="0" u="none" strike="noStrike" cap="none" normalizeH="0" baseline="0" dirty="0">
+                <a:ln>
+                  <a:noFill/>
+                </a:ln>
+                <a:solidFill>
+                  <a:schemeClr val="tx1"/>
+                </a:solidFill>
+                <a:effectLst/>
+                <a:latin typeface="Arial" panose="020B0604020202020204" pitchFamily="34" charset="0"/>
+              </a:rPr>
+              <a:t>Easier teamwork </a:t>
+            </a:r>
+          </a:p>
+          <a:p>
+            <a:pPr lvl="1" eaLnBrk="0" fontAlgn="base" hangingPunct="0">
+              <a:spcBef>
+                <a:spcPct val="0"/>
+              </a:spcBef>
+              <a:spcAft>
+                <a:spcPct val="0"/>
+              </a:spcAft>
+              <a:buFontTx/>
+              <a:buChar char="•"/>
+            </a:pPr>
+            <a:r>
+              <a:rPr kumimoji="0" lang="en-US" altLang="en-US" sz="1400" b="0" i="0" u="none" strike="noStrike" cap="none" normalizeH="0" baseline="0" dirty="0">
+                <a:ln>
+                  <a:noFill/>
+                </a:ln>
+                <a:solidFill>
+                  <a:schemeClr val="tx1"/>
+                </a:solidFill>
+                <a:effectLst/>
+                <a:latin typeface="Arial" panose="020B0604020202020204" pitchFamily="34" charset="0"/>
+              </a:rPr>
+              <a:t>Easier testing </a:t>
+            </a:r>
+          </a:p>
+          <a:p>
+            <a:pPr lvl="1" eaLnBrk="0" fontAlgn="base" hangingPunct="0">
+              <a:spcBef>
+                <a:spcPct val="0"/>
+              </a:spcBef>
+              <a:spcAft>
+                <a:spcPct val="0"/>
+              </a:spcAft>
+              <a:buFontTx/>
+              <a:buChar char="•"/>
+            </a:pPr>
+            <a:r>
+              <a:rPr kumimoji="0" lang="en-US" altLang="en-US" sz="1400" b="0" i="0" u="none" strike="noStrike" cap="none" normalizeH="0" baseline="0" dirty="0">
+                <a:ln>
+                  <a:noFill/>
+                </a:ln>
+                <a:solidFill>
+                  <a:schemeClr val="tx1"/>
+                </a:solidFill>
+                <a:effectLst/>
+                <a:latin typeface="Arial" panose="020B0604020202020204" pitchFamily="34" charset="0"/>
+              </a:rPr>
+              <a:t>More scalable applications</a:t>
+            </a:r>
+          </a:p>
+          <a:p>
+            <a:pPr marL="0" marR="0" lvl="0" indent="0" algn="l" defTabSz="914400" rtl="0" eaLnBrk="0" fontAlgn="base" latinLnBrk="0" hangingPunct="0">
+              <a:lnSpc>
+                <a:spcPct val="100000"/>
+              </a:lnSpc>
+              <a:spcBef>
+                <a:spcPct val="0"/>
+              </a:spcBef>
+              <a:spcAft>
+                <a:spcPct val="0"/>
+              </a:spcAft>
+              <a:buClrTx/>
+              <a:buSzTx/>
+              <a:buFontTx/>
+              <a:buNone/>
+              <a:tabLst/>
+            </a:pPr>
+            <a:endParaRPr kumimoji="0" lang="en-US" altLang="en-US" b="0" i="0" u="none" strike="noStrike" cap="none" normalizeH="0" baseline="0" dirty="0">
+              <a:ln>
+                <a:noFill/>
+              </a:ln>
+              <a:solidFill>
+                <a:schemeClr val="tx1"/>
+              </a:solidFill>
+              <a:effectLst/>
+              <a:latin typeface="Arial" panose="020B0604020202020204" pitchFamily="34" charset="0"/>
+            </a:endParaRPr>
+          </a:p>
+        </p:txBody>
+      </p:sp>
+    </p:spTree>
+    <p:extLst>
+      <p:ext uri="{BB962C8B-B14F-4D97-AF65-F5344CB8AC3E}">
+        <p14:creationId xmlns:p14="http://schemas.microsoft.com/office/powerpoint/2010/main" val="3296483826"/>
+      </p:ext>
+    </p:extLst>
+  </p:cSld>
+  <p:clrMapOvr>
+    <a:masterClrMapping/>
+  </p:clrMapOvr>
+</p:sld>
+</file>
+
+<file path=ppt/slides/slide9.xml><?xml version="1.0" encoding="utf-8"?>
+<p:sld xmlns:a="http://schemas.openxmlformats.org/drawingml/2006/main" xmlns:r="http://schemas.openxmlformats.org/officeDocument/2006/relationships" xmlns:p="http://schemas.openxmlformats.org/presentationml/2006/main">
+  <p:cSld>
+    <p:spTree>
+      <p:nvGrpSpPr>
+        <p:cNvPr id="1" name=""/>
+        <p:cNvGrpSpPr/>
+        <p:nvPr/>
+      </p:nvGrpSpPr>
+      <p:grpSpPr>
+        <a:xfrm>
+          <a:off x="0" y="0"/>
+          <a:ext cx="0" cy="0"/>
+          <a:chOff x="0" y="0"/>
+          <a:chExt cx="0" cy="0"/>
+        </a:xfrm>
+      </p:grpSpPr>
+      <p:sp>
+        <p:nvSpPr>
+          <p:cNvPr id="3" name="Rectangle 2">
+            <a:extLst>
+              <a:ext uri="{FF2B5EF4-FFF2-40B4-BE49-F238E27FC236}">
+                <a16:creationId xmlns:a16="http://schemas.microsoft.com/office/drawing/2014/main" id="{A7297B1F-75BE-43C2-9DE4-7B5A29C24859}"/>
+              </a:ext>
+            </a:extLst>
+          </p:cNvPr>
+          <p:cNvSpPr/>
+          <p:nvPr/>
+        </p:nvSpPr>
+        <p:spPr>
+          <a:xfrm>
+            <a:off x="805320" y="573782"/>
+            <a:ext cx="2994731" cy="461665"/>
+          </a:xfrm>
+          <a:prstGeom prst="rect">
+            <a:avLst/>
+          </a:prstGeom>
+        </p:spPr>
+        <p:txBody>
+          <a:bodyPr wrap="none">
+            <a:spAutoFit/>
+          </a:bodyPr>
+          <a:lstStyle/>
+          <a:p>
+            <a:r>
+              <a:rPr lang="en-US" sz="2400" b="1" dirty="0"/>
+              <a:t>3. Objects and Classes</a:t>
+            </a:r>
+          </a:p>
+        </p:txBody>
+      </p:sp>
+      <p:sp>
+        <p:nvSpPr>
+          <p:cNvPr id="4" name="Rectangle 3">
+            <a:extLst>
+              <a:ext uri="{FF2B5EF4-FFF2-40B4-BE49-F238E27FC236}">
+                <a16:creationId xmlns:a16="http://schemas.microsoft.com/office/drawing/2014/main" id="{4DD69371-5432-4834-A563-E6EFFA57AD26}"/>
+              </a:ext>
+            </a:extLst>
+          </p:cNvPr>
+          <p:cNvSpPr/>
+          <p:nvPr/>
+        </p:nvSpPr>
+        <p:spPr>
+          <a:xfrm>
+            <a:off x="1374777" y="1441688"/>
+            <a:ext cx="824265" cy="400110"/>
+          </a:xfrm>
+          <a:prstGeom prst="rect">
+            <a:avLst/>
+          </a:prstGeom>
+        </p:spPr>
+        <p:txBody>
+          <a:bodyPr wrap="none">
+            <a:spAutoFit/>
+          </a:bodyPr>
+          <a:lstStyle/>
+          <a:p>
+            <a:r>
+              <a:rPr lang="en-US" sz="2000" dirty="0"/>
+              <a:t>Class?</a:t>
+            </a:r>
+          </a:p>
+        </p:txBody>
+      </p:sp>
+      <p:sp>
+        <p:nvSpPr>
+          <p:cNvPr id="5" name="Rectangle 4">
+            <a:extLst>
+              <a:ext uri="{FF2B5EF4-FFF2-40B4-BE49-F238E27FC236}">
+                <a16:creationId xmlns:a16="http://schemas.microsoft.com/office/drawing/2014/main" id="{6A796A6A-A667-44DB-A6EB-AB979FA88D87}"/>
+              </a:ext>
+            </a:extLst>
+          </p:cNvPr>
+          <p:cNvSpPr/>
+          <p:nvPr/>
+        </p:nvSpPr>
+        <p:spPr>
+          <a:xfrm>
+            <a:off x="617349" y="1900245"/>
+            <a:ext cx="4572000" cy="1477328"/>
+          </a:xfrm>
+          <a:prstGeom prst="rect">
+            <a:avLst/>
+          </a:prstGeom>
+        </p:spPr>
+        <p:txBody>
+          <a:bodyPr>
+            <a:spAutoFit/>
+          </a:bodyPr>
+          <a:lstStyle/>
+          <a:p>
+            <a:r>
+              <a:rPr lang="en-US" dirty="0"/>
+              <a:t>A class is a blueprint or template used to create objects.</a:t>
+            </a:r>
+          </a:p>
+          <a:p>
+            <a:r>
+              <a:rPr lang="en-US" dirty="0"/>
+              <a:t>Think of a class as an architectural plan.</a:t>
+            </a:r>
+          </a:p>
+          <a:p>
+            <a:r>
+              <a:rPr lang="en-US" dirty="0"/>
+              <a:t>The plan is </a:t>
+            </a:r>
+            <a:r>
+              <a:rPr lang="en-US" b="1" dirty="0"/>
+              <a:t>not</a:t>
+            </a:r>
+            <a:r>
+              <a:rPr lang="en-US" dirty="0"/>
+              <a:t> the house.</a:t>
+            </a:r>
+          </a:p>
+          <a:p>
+            <a:r>
+              <a:rPr lang="en-US" dirty="0"/>
+              <a:t>It is used to build many houses.</a:t>
+            </a:r>
+          </a:p>
+        </p:txBody>
+      </p:sp>
+      <p:sp>
+        <p:nvSpPr>
+          <p:cNvPr id="6" name="Rectangle 5">
+            <a:extLst>
+              <a:ext uri="{FF2B5EF4-FFF2-40B4-BE49-F238E27FC236}">
+                <a16:creationId xmlns:a16="http://schemas.microsoft.com/office/drawing/2014/main" id="{18EDE950-C6FC-47B4-9A0E-7B4A1DF5B7AC}"/>
+              </a:ext>
+            </a:extLst>
+          </p:cNvPr>
+          <p:cNvSpPr/>
+          <p:nvPr/>
+        </p:nvSpPr>
+        <p:spPr>
+          <a:xfrm>
+            <a:off x="6544654" y="1472466"/>
+            <a:ext cx="910827" cy="369332"/>
+          </a:xfrm>
+          <a:prstGeom prst="rect">
+            <a:avLst/>
+          </a:prstGeom>
+        </p:spPr>
+        <p:txBody>
+          <a:bodyPr wrap="none">
+            <a:spAutoFit/>
+          </a:bodyPr>
+          <a:lstStyle/>
+          <a:p>
+            <a:r>
+              <a:rPr lang="en-US" dirty="0"/>
+              <a:t>Object?</a:t>
+            </a:r>
+          </a:p>
+        </p:txBody>
+      </p:sp>
+      <p:sp>
+        <p:nvSpPr>
+          <p:cNvPr id="7" name="Rectangle 6">
+            <a:extLst>
+              <a:ext uri="{FF2B5EF4-FFF2-40B4-BE49-F238E27FC236}">
+                <a16:creationId xmlns:a16="http://schemas.microsoft.com/office/drawing/2014/main" id="{E0439004-7843-4BE8-AF90-246DDD8A018B}"/>
+              </a:ext>
+            </a:extLst>
+          </p:cNvPr>
+          <p:cNvSpPr/>
+          <p:nvPr/>
+        </p:nvSpPr>
+        <p:spPr>
+          <a:xfrm>
+            <a:off x="5577190" y="2158462"/>
+            <a:ext cx="3427325" cy="646331"/>
+          </a:xfrm>
+          <a:prstGeom prst="rect">
+            <a:avLst/>
+          </a:prstGeom>
+        </p:spPr>
+        <p:txBody>
+          <a:bodyPr wrap="square">
+            <a:spAutoFit/>
+          </a:bodyPr>
+          <a:lstStyle/>
+          <a:p>
+            <a:r>
+              <a:rPr lang="en-US" dirty="0"/>
+              <a:t>An object is an actual instance created from a class.</a:t>
+            </a:r>
+          </a:p>
+        </p:txBody>
+      </p:sp>
+    </p:spTree>
+    <p:extLst>
+      <p:ext uri="{BB962C8B-B14F-4D97-AF65-F5344CB8AC3E}">
+        <p14:creationId xmlns:p14="http://schemas.microsoft.com/office/powerpoint/2010/main" val="1659408146"/>
       </p:ext>
     </p:extLst>
   </p:cSld>

--- a/course/course8.pptx
+++ b/course/course8.pptx
@@ -5,7 +5,7 @@
     <p:sldMasterId id="2147483825" r:id="rId1"/>
   </p:sldMasterIdLst>
   <p:notesMasterIdLst>
-    <p:notesMasterId r:id="rId14"/>
+    <p:notesMasterId r:id="rId13"/>
   </p:notesMasterIdLst>
   <p:sldIdLst>
     <p:sldId id="256" r:id="rId2"/>
@@ -13,13 +13,12 @@
     <p:sldId id="281" r:id="rId4"/>
     <p:sldId id="280" r:id="rId5"/>
     <p:sldId id="282" r:id="rId6"/>
-    <p:sldId id="283" r:id="rId7"/>
-    <p:sldId id="284" r:id="rId8"/>
-    <p:sldId id="285" r:id="rId9"/>
-    <p:sldId id="286" r:id="rId10"/>
-    <p:sldId id="287" r:id="rId11"/>
-    <p:sldId id="288" r:id="rId12"/>
-    <p:sldId id="289" r:id="rId13"/>
+    <p:sldId id="284" r:id="rId7"/>
+    <p:sldId id="285" r:id="rId8"/>
+    <p:sldId id="286" r:id="rId9"/>
+    <p:sldId id="287" r:id="rId10"/>
+    <p:sldId id="288" r:id="rId11"/>
+    <p:sldId id="289" r:id="rId12"/>
   </p:sldIdLst>
   <p:sldSz cx="9144000" cy="5143500" type="screen16x9"/>
   <p:notesSz cx="6858000" cy="9144000"/>
@@ -220,7 +219,7 @@
           <a:p>
             <a:fld id="{B157FD80-104E-477A-84DF-AAA7C9A1979B}" type="datetimeFigureOut">
               <a:rPr lang="en-ZA" smtClean="0"/>
-              <a:t>2026/07/07</a:t>
+              <a:t>2026/07/09</a:t>
             </a:fld>
             <a:endParaRPr lang="en-ZA"/>
           </a:p>
@@ -637,7 +636,7 @@
           <a:p>
             <a:fld id="{8353421B-4862-4D3A-B9AB-BA663EF3CA0D}" type="datetimeFigureOut">
               <a:rPr lang="en-ZA" smtClean="0"/>
-              <a:t>2026/07/07</a:t>
+              <a:t>2026/07/09</a:t>
             </a:fld>
             <a:endParaRPr lang="en-ZA"/>
           </a:p>
@@ -837,7 +836,7 @@
           <a:p>
             <a:fld id="{8353421B-4862-4D3A-B9AB-BA663EF3CA0D}" type="datetimeFigureOut">
               <a:rPr lang="en-ZA" smtClean="0"/>
-              <a:t>2026/07/07</a:t>
+              <a:t>2026/07/09</a:t>
             </a:fld>
             <a:endParaRPr lang="en-ZA"/>
           </a:p>
@@ -1047,7 +1046,7 @@
           <a:p>
             <a:fld id="{8353421B-4862-4D3A-B9AB-BA663EF3CA0D}" type="datetimeFigureOut">
               <a:rPr lang="en-ZA" smtClean="0"/>
-              <a:t>2026/07/07</a:t>
+              <a:t>2026/07/09</a:t>
             </a:fld>
             <a:endParaRPr lang="en-ZA"/>
           </a:p>
@@ -1528,7 +1527,7 @@
           <a:p>
             <a:fld id="{8353421B-4862-4D3A-B9AB-BA663EF3CA0D}" type="datetimeFigureOut">
               <a:rPr lang="en-ZA" smtClean="0"/>
-              <a:t>2026/07/07</a:t>
+              <a:t>2026/07/09</a:t>
             </a:fld>
             <a:endParaRPr lang="en-ZA"/>
           </a:p>
@@ -1804,7 +1803,7 @@
           <a:p>
             <a:fld id="{8353421B-4862-4D3A-B9AB-BA663EF3CA0D}" type="datetimeFigureOut">
               <a:rPr lang="en-ZA" smtClean="0"/>
-              <a:t>2026/07/07</a:t>
+              <a:t>2026/07/09</a:t>
             </a:fld>
             <a:endParaRPr lang="en-ZA"/>
           </a:p>
@@ -2072,7 +2071,7 @@
           <a:p>
             <a:fld id="{8353421B-4862-4D3A-B9AB-BA663EF3CA0D}" type="datetimeFigureOut">
               <a:rPr lang="en-ZA" smtClean="0"/>
-              <a:t>2026/07/07</a:t>
+              <a:t>2026/07/09</a:t>
             </a:fld>
             <a:endParaRPr lang="en-ZA"/>
           </a:p>
@@ -2487,7 +2486,7 @@
           <a:p>
             <a:fld id="{8353421B-4862-4D3A-B9AB-BA663EF3CA0D}" type="datetimeFigureOut">
               <a:rPr lang="en-ZA" smtClean="0"/>
-              <a:t>2026/07/07</a:t>
+              <a:t>2026/07/09</a:t>
             </a:fld>
             <a:endParaRPr lang="en-ZA"/>
           </a:p>
@@ -2629,7 +2628,7 @@
           <a:p>
             <a:fld id="{8353421B-4862-4D3A-B9AB-BA663EF3CA0D}" type="datetimeFigureOut">
               <a:rPr lang="en-ZA" smtClean="0"/>
-              <a:t>2026/07/07</a:t>
+              <a:t>2026/07/09</a:t>
             </a:fld>
             <a:endParaRPr lang="en-ZA"/>
           </a:p>
@@ -2742,7 +2741,7 @@
           <a:p>
             <a:fld id="{8353421B-4862-4D3A-B9AB-BA663EF3CA0D}" type="datetimeFigureOut">
               <a:rPr lang="en-ZA" smtClean="0"/>
-              <a:t>2026/07/07</a:t>
+              <a:t>2026/07/09</a:t>
             </a:fld>
             <a:endParaRPr lang="en-ZA"/>
           </a:p>
@@ -3055,7 +3054,7 @@
           <a:p>
             <a:fld id="{8353421B-4862-4D3A-B9AB-BA663EF3CA0D}" type="datetimeFigureOut">
               <a:rPr lang="en-ZA" smtClean="0"/>
-              <a:t>2026/07/07</a:t>
+              <a:t>2026/07/09</a:t>
             </a:fld>
             <a:endParaRPr lang="en-ZA"/>
           </a:p>
@@ -3344,7 +3343,7 @@
           <a:p>
             <a:fld id="{8353421B-4862-4D3A-B9AB-BA663EF3CA0D}" type="datetimeFigureOut">
               <a:rPr lang="en-ZA" smtClean="0"/>
-              <a:t>2026/07/07</a:t>
+              <a:t>2026/07/09</a:t>
             </a:fld>
             <a:endParaRPr lang="en-ZA"/>
           </a:p>
@@ -3597,7 +3596,7 @@
           <a:p>
             <a:fld id="{8353421B-4862-4D3A-B9AB-BA663EF3CA0D}" type="datetimeFigureOut">
               <a:rPr lang="en-ZA" smtClean="0"/>
-              <a:t>2026/07/07</a:t>
+              <a:t>2026/07/09</a:t>
             </a:fld>
             <a:endParaRPr lang="en-ZA"/>
           </a:p>
@@ -4118,66 +4117,6 @@
       </p:grpSpPr>
       <p:pic>
         <p:nvPicPr>
-          <p:cNvPr id="3" name="Image 2">
-            <a:extLst>
-              <a:ext uri="{FF2B5EF4-FFF2-40B4-BE49-F238E27FC236}">
-                <a16:creationId xmlns:a16="http://schemas.microsoft.com/office/drawing/2014/main" id="{F5006178-7923-46F5-87AB-C864D696B01A}"/>
-              </a:ext>
-            </a:extLst>
-          </p:cNvPr>
-          <p:cNvPicPr>
-            <a:picLocks noChangeAspect="1"/>
-          </p:cNvPicPr>
-          <p:nvPr/>
-        </p:nvPicPr>
-        <p:blipFill>
-          <a:blip r:embed="rId2"/>
-          <a:stretch>
-            <a:fillRect/>
-          </a:stretch>
-        </p:blipFill>
-        <p:spPr>
-          <a:xfrm>
-            <a:off x="0" y="75902"/>
-            <a:ext cx="9144000" cy="4991695"/>
-          </a:xfrm>
-          <a:prstGeom prst="rect">
-            <a:avLst/>
-          </a:prstGeom>
-        </p:spPr>
-      </p:pic>
-    </p:spTree>
-    <p:extLst>
-      <p:ext uri="{BB962C8B-B14F-4D97-AF65-F5344CB8AC3E}">
-        <p14:creationId xmlns:p14="http://schemas.microsoft.com/office/powerpoint/2010/main" val="2312019106"/>
-      </p:ext>
-    </p:extLst>
-  </p:cSld>
-  <p:clrMapOvr>
-    <a:masterClrMapping/>
-  </p:clrMapOvr>
-</p:sld>
-</file>
-
-<file path=ppt/slides/slide11.xml><?xml version="1.0" encoding="utf-8"?>
-<p:sld xmlns:a="http://schemas.openxmlformats.org/drawingml/2006/main" xmlns:r="http://schemas.openxmlformats.org/officeDocument/2006/relationships" xmlns:p="http://schemas.openxmlformats.org/presentationml/2006/main">
-  <p:cSld>
-    <p:spTree>
-      <p:nvGrpSpPr>
-        <p:cNvPr id="1" name=""/>
-        <p:cNvGrpSpPr/>
-        <p:nvPr/>
-      </p:nvGrpSpPr>
-      <p:grpSpPr>
-        <a:xfrm>
-          <a:off x="0" y="0"/>
-          <a:ext cx="0" cy="0"/>
-          <a:chOff x="0" y="0"/>
-          <a:chExt cx="0" cy="0"/>
-        </a:xfrm>
-      </p:grpSpPr>
-      <p:pic>
-        <p:nvPicPr>
           <p:cNvPr id="2" name="Image 1">
             <a:extLst>
               <a:ext uri="{FF2B5EF4-FFF2-40B4-BE49-F238E27FC236}">
@@ -4206,6 +4145,213 @@
           </a:prstGeom>
         </p:spPr>
       </p:pic>
+      <p:cxnSp>
+        <p:nvCxnSpPr>
+          <p:cNvPr id="4" name="Connecteur droit avec flèche 3">
+            <a:extLst>
+              <a:ext uri="{FF2B5EF4-FFF2-40B4-BE49-F238E27FC236}">
+                <a16:creationId xmlns:a16="http://schemas.microsoft.com/office/drawing/2014/main" id="{01B8E967-882A-4C79-8DC7-540F7B71FFD5}"/>
+              </a:ext>
+            </a:extLst>
+          </p:cNvPr>
+          <p:cNvCxnSpPr>
+            <a:cxnSpLocks/>
+            <a:stCxn id="5" idx="1"/>
+          </p:cNvCxnSpPr>
+          <p:nvPr/>
+        </p:nvCxnSpPr>
+        <p:spPr>
+          <a:xfrm flipH="1" flipV="1">
+            <a:off x="5304532" y="3753587"/>
+            <a:ext cx="388998" cy="311502"/>
+          </a:xfrm>
+          <a:prstGeom prst="straightConnector1">
+            <a:avLst/>
+          </a:prstGeom>
+          <a:ln w="57150">
+            <a:tailEnd type="triangle"/>
+          </a:ln>
+        </p:spPr>
+        <p:style>
+          <a:lnRef idx="1">
+            <a:schemeClr val="accent1"/>
+          </a:lnRef>
+          <a:fillRef idx="0">
+            <a:schemeClr val="accent1"/>
+          </a:fillRef>
+          <a:effectRef idx="0">
+            <a:schemeClr val="accent1"/>
+          </a:effectRef>
+          <a:fontRef idx="minor">
+            <a:schemeClr val="tx1"/>
+          </a:fontRef>
+        </p:style>
+      </p:cxnSp>
+      <p:sp>
+        <p:nvSpPr>
+          <p:cNvPr id="5" name="ZoneTexte 4">
+            <a:extLst>
+              <a:ext uri="{FF2B5EF4-FFF2-40B4-BE49-F238E27FC236}">
+                <a16:creationId xmlns:a16="http://schemas.microsoft.com/office/drawing/2014/main" id="{BCB798A9-0F8A-4F10-9211-46877E78735D}"/>
+              </a:ext>
+            </a:extLst>
+          </p:cNvPr>
+          <p:cNvSpPr txBox="1"/>
+          <p:nvPr/>
+        </p:nvSpPr>
+        <p:spPr>
+          <a:xfrm>
+            <a:off x="5693530" y="3803479"/>
+            <a:ext cx="1651982" cy="523220"/>
+          </a:xfrm>
+          <a:prstGeom prst="rect">
+            <a:avLst/>
+          </a:prstGeom>
+          <a:noFill/>
+        </p:spPr>
+        <p:txBody>
+          <a:bodyPr wrap="square" rtlCol="0">
+            <a:spAutoFit/>
+          </a:bodyPr>
+          <a:lstStyle/>
+          <a:p>
+            <a:r>
+              <a:rPr lang="en-US" sz="2800" dirty="0">
+                <a:ln w="0"/>
+                <a:solidFill>
+                  <a:schemeClr val="accent1"/>
+                </a:solidFill>
+                <a:effectLst>
+                  <a:outerShdw blurRad="38100" dist="25400" dir="5400000" algn="ctr" rotWithShape="0">
+                    <a:srgbClr val="6E747A">
+                      <a:alpha val="43000"/>
+                    </a:srgbClr>
+                  </a:outerShdw>
+                </a:effectLst>
+              </a:rPr>
+              <a:t>Object </a:t>
+            </a:r>
+          </a:p>
+        </p:txBody>
+      </p:sp>
+      <p:sp>
+        <p:nvSpPr>
+          <p:cNvPr id="6" name="ZoneTexte 5">
+            <a:extLst>
+              <a:ext uri="{FF2B5EF4-FFF2-40B4-BE49-F238E27FC236}">
+                <a16:creationId xmlns:a16="http://schemas.microsoft.com/office/drawing/2014/main" id="{50A7E568-66C6-43B8-AEB0-A7E55618A3A7}"/>
+              </a:ext>
+            </a:extLst>
+          </p:cNvPr>
+          <p:cNvSpPr txBox="1"/>
+          <p:nvPr/>
+        </p:nvSpPr>
+        <p:spPr>
+          <a:xfrm>
+            <a:off x="6401642" y="1705525"/>
+            <a:ext cx="1651982" cy="523220"/>
+          </a:xfrm>
+          <a:prstGeom prst="rect">
+            <a:avLst/>
+          </a:prstGeom>
+          <a:noFill/>
+        </p:spPr>
+        <p:txBody>
+          <a:bodyPr wrap="square" rtlCol="0">
+            <a:spAutoFit/>
+          </a:bodyPr>
+          <a:lstStyle/>
+          <a:p>
+            <a:r>
+              <a:rPr lang="en-US" sz="2800" dirty="0">
+                <a:ln w="0"/>
+                <a:solidFill>
+                  <a:schemeClr val="accent1"/>
+                </a:solidFill>
+                <a:effectLst>
+                  <a:outerShdw blurRad="38100" dist="25400" dir="5400000" algn="ctr" rotWithShape="0">
+                    <a:srgbClr val="6E747A">
+                      <a:alpha val="43000"/>
+                    </a:srgbClr>
+                  </a:outerShdw>
+                </a:effectLst>
+              </a:rPr>
+              <a:t>cl</a:t>
+            </a:r>
+            <a:r>
+              <a:rPr lang="fr-FR" sz="2800" dirty="0" err="1">
+                <a:ln w="0"/>
+                <a:solidFill>
+                  <a:schemeClr val="accent1"/>
+                </a:solidFill>
+                <a:effectLst>
+                  <a:outerShdw blurRad="38100" dist="25400" dir="5400000" algn="ctr" rotWithShape="0">
+                    <a:srgbClr val="6E747A">
+                      <a:alpha val="43000"/>
+                    </a:srgbClr>
+                  </a:outerShdw>
+                </a:effectLst>
+              </a:rPr>
+              <a:t>ass</a:t>
+            </a:r>
+            <a:endParaRPr lang="en-US" sz="2800" dirty="0">
+              <a:ln w="0"/>
+              <a:solidFill>
+                <a:schemeClr val="accent1"/>
+              </a:solidFill>
+              <a:effectLst>
+                <a:outerShdw blurRad="38100" dist="25400" dir="5400000" algn="ctr" rotWithShape="0">
+                  <a:srgbClr val="6E747A">
+                    <a:alpha val="43000"/>
+                  </a:srgbClr>
+                </a:outerShdw>
+              </a:effectLst>
+            </a:endParaRPr>
+          </a:p>
+        </p:txBody>
+      </p:sp>
+      <p:cxnSp>
+        <p:nvCxnSpPr>
+          <p:cNvPr id="8" name="Connecteur droit avec flèche 7">
+            <a:extLst>
+              <a:ext uri="{FF2B5EF4-FFF2-40B4-BE49-F238E27FC236}">
+                <a16:creationId xmlns:a16="http://schemas.microsoft.com/office/drawing/2014/main" id="{8E4DEE71-677E-4F78-B3F7-04DBCD5D7911}"/>
+              </a:ext>
+            </a:extLst>
+          </p:cNvPr>
+          <p:cNvCxnSpPr>
+            <a:cxnSpLocks/>
+            <a:stCxn id="6" idx="1"/>
+          </p:cNvCxnSpPr>
+          <p:nvPr/>
+        </p:nvCxnSpPr>
+        <p:spPr>
+          <a:xfrm flipH="1">
+            <a:off x="5519240" y="1967135"/>
+            <a:ext cx="882402" cy="105859"/>
+          </a:xfrm>
+          <a:prstGeom prst="straightConnector1">
+            <a:avLst/>
+          </a:prstGeom>
+          <a:ln w="57150">
+            <a:tailEnd type="triangle"/>
+          </a:ln>
+        </p:spPr>
+        <p:style>
+          <a:lnRef idx="1">
+            <a:schemeClr val="accent1"/>
+          </a:lnRef>
+          <a:fillRef idx="0">
+            <a:schemeClr val="accent1"/>
+          </a:fillRef>
+          <a:effectRef idx="0">
+            <a:schemeClr val="accent1"/>
+          </a:effectRef>
+          <a:fontRef idx="minor">
+            <a:schemeClr val="tx1"/>
+          </a:fontRef>
+        </p:style>
+      </p:cxnSp>
     </p:spTree>
     <p:extLst>
       <p:ext uri="{BB962C8B-B14F-4D97-AF65-F5344CB8AC3E}">
@@ -4219,7 +4365,7 @@
 </p:sld>
 </file>
 
-<file path=ppt/slides/slide12.xml><?xml version="1.0" encoding="utf-8"?>
+<file path=ppt/slides/slide11.xml><?xml version="1.0" encoding="utf-8"?>
 <p:sld xmlns:a="http://schemas.openxmlformats.org/drawingml/2006/main" xmlns:r="http://schemas.openxmlformats.org/officeDocument/2006/relationships" xmlns:p="http://schemas.openxmlformats.org/presentationml/2006/main">
   <p:cSld>
     <p:spTree>
@@ -4520,8 +4666,37 @@
         </p:blipFill>
         <p:spPr>
           <a:xfrm>
-            <a:off x="1701652" y="1247707"/>
-            <a:ext cx="5947152" cy="2743321"/>
+            <a:off x="1534937" y="35756"/>
+            <a:ext cx="5355745" cy="2470515"/>
+          </a:xfrm>
+          <a:prstGeom prst="rect">
+            <a:avLst/>
+          </a:prstGeom>
+        </p:spPr>
+      </p:pic>
+      <p:pic>
+        <p:nvPicPr>
+          <p:cNvPr id="3" name="Image 2">
+            <a:extLst>
+              <a:ext uri="{FF2B5EF4-FFF2-40B4-BE49-F238E27FC236}">
+                <a16:creationId xmlns:a16="http://schemas.microsoft.com/office/drawing/2014/main" id="{D72A1556-3E09-4FC0-9D7A-837CB0050CFA}"/>
+              </a:ext>
+            </a:extLst>
+          </p:cNvPr>
+          <p:cNvPicPr>
+            <a:picLocks noChangeAspect="1"/>
+          </p:cNvPicPr>
+          <p:nvPr/>
+        </p:nvPicPr>
+        <p:blipFill rotWithShape="1">
+          <a:blip r:embed="rId3"/>
+          <a:srcRect t="16367" r="1439"/>
+          <a:stretch/>
+        </p:blipFill>
+        <p:spPr>
+          <a:xfrm>
+            <a:off x="1534937" y="2637229"/>
+            <a:ext cx="5355745" cy="2267052"/>
           </a:xfrm>
           <a:prstGeom prst="rect">
             <a:avLst/>
@@ -4558,66 +4733,6 @@
           <a:chExt cx="0" cy="0"/>
         </a:xfrm>
       </p:grpSpPr>
-      <p:pic>
-        <p:nvPicPr>
-          <p:cNvPr id="2" name="Image 1">
-            <a:extLst>
-              <a:ext uri="{FF2B5EF4-FFF2-40B4-BE49-F238E27FC236}">
-                <a16:creationId xmlns:a16="http://schemas.microsoft.com/office/drawing/2014/main" id="{D6973006-AE6E-41E1-9EF8-B84CAC679DEB}"/>
-              </a:ext>
-            </a:extLst>
-          </p:cNvPr>
-          <p:cNvPicPr>
-            <a:picLocks noChangeAspect="1"/>
-          </p:cNvPicPr>
-          <p:nvPr/>
-        </p:nvPicPr>
-        <p:blipFill>
-          <a:blip r:embed="rId2"/>
-          <a:stretch>
-            <a:fillRect/>
-          </a:stretch>
-        </p:blipFill>
-        <p:spPr>
-          <a:xfrm>
-            <a:off x="1815958" y="1196904"/>
-            <a:ext cx="5512083" cy="2749691"/>
-          </a:xfrm>
-          <a:prstGeom prst="rect">
-            <a:avLst/>
-          </a:prstGeom>
-        </p:spPr>
-      </p:pic>
-    </p:spTree>
-    <p:extLst>
-      <p:ext uri="{BB962C8B-B14F-4D97-AF65-F5344CB8AC3E}">
-        <p14:creationId xmlns:p14="http://schemas.microsoft.com/office/powerpoint/2010/main" val="2565872102"/>
-      </p:ext>
-    </p:extLst>
-  </p:cSld>
-  <p:clrMapOvr>
-    <a:masterClrMapping/>
-  </p:clrMapOvr>
-</p:sld>
-</file>
-
-<file path=ppt/slides/slide7.xml><?xml version="1.0" encoding="utf-8"?>
-<p:sld xmlns:a="http://schemas.openxmlformats.org/drawingml/2006/main" xmlns:r="http://schemas.openxmlformats.org/officeDocument/2006/relationships" xmlns:p="http://schemas.openxmlformats.org/presentationml/2006/main">
-  <p:cSld>
-    <p:spTree>
-      <p:nvGrpSpPr>
-        <p:cNvPr id="1" name=""/>
-        <p:cNvGrpSpPr/>
-        <p:nvPr/>
-      </p:nvGrpSpPr>
-      <p:grpSpPr>
-        <a:xfrm>
-          <a:off x="0" y="0"/>
-          <a:ext cx="0" cy="0"/>
-          <a:chOff x="0" y="0"/>
-          <a:chExt cx="0" cy="0"/>
-        </a:xfrm>
-      </p:grpSpPr>
       <p:sp>
         <p:nvSpPr>
           <p:cNvPr id="2" name="Rectangle 1">
@@ -4763,7 +4878,7 @@
 </p:sld>
 </file>
 
-<file path=ppt/slides/slide8.xml><?xml version="1.0" encoding="utf-8"?>
+<file path=ppt/slides/slide7.xml><?xml version="1.0" encoding="utf-8"?>
 <p:sld xmlns:a="http://schemas.openxmlformats.org/drawingml/2006/main" xmlns:r="http://schemas.openxmlformats.org/officeDocument/2006/relationships" xmlns:p="http://schemas.openxmlformats.org/presentationml/2006/main">
   <p:cSld>
     <p:spTree>
@@ -5356,6 +5471,232 @@
 </p:sld>
 </file>
 
+<file path=ppt/slides/slide8.xml><?xml version="1.0" encoding="utf-8"?>
+<p:sld xmlns:a="http://schemas.openxmlformats.org/drawingml/2006/main" xmlns:r="http://schemas.openxmlformats.org/officeDocument/2006/relationships" xmlns:p="http://schemas.openxmlformats.org/presentationml/2006/main">
+  <p:cSld>
+    <p:spTree>
+      <p:nvGrpSpPr>
+        <p:cNvPr id="1" name=""/>
+        <p:cNvGrpSpPr/>
+        <p:nvPr/>
+      </p:nvGrpSpPr>
+      <p:grpSpPr>
+        <a:xfrm>
+          <a:off x="0" y="0"/>
+          <a:ext cx="0" cy="0"/>
+          <a:chOff x="0" y="0"/>
+          <a:chExt cx="0" cy="0"/>
+        </a:xfrm>
+      </p:grpSpPr>
+      <p:sp>
+        <p:nvSpPr>
+          <p:cNvPr id="3" name="Rectangle 2">
+            <a:extLst>
+              <a:ext uri="{FF2B5EF4-FFF2-40B4-BE49-F238E27FC236}">
+                <a16:creationId xmlns:a16="http://schemas.microsoft.com/office/drawing/2014/main" id="{A7297B1F-75BE-43C2-9DE4-7B5A29C24859}"/>
+              </a:ext>
+            </a:extLst>
+          </p:cNvPr>
+          <p:cNvSpPr/>
+          <p:nvPr/>
+        </p:nvSpPr>
+        <p:spPr>
+          <a:xfrm>
+            <a:off x="805320" y="573782"/>
+            <a:ext cx="2994731" cy="461665"/>
+          </a:xfrm>
+          <a:prstGeom prst="rect">
+            <a:avLst/>
+          </a:prstGeom>
+        </p:spPr>
+        <p:txBody>
+          <a:bodyPr wrap="none">
+            <a:spAutoFit/>
+          </a:bodyPr>
+          <a:lstStyle/>
+          <a:p>
+            <a:r>
+              <a:rPr lang="en-US" sz="2400" b="1" dirty="0"/>
+              <a:t>3. Objects and Classes</a:t>
+            </a:r>
+          </a:p>
+        </p:txBody>
+      </p:sp>
+      <p:sp>
+        <p:nvSpPr>
+          <p:cNvPr id="4" name="Rectangle 3">
+            <a:extLst>
+              <a:ext uri="{FF2B5EF4-FFF2-40B4-BE49-F238E27FC236}">
+                <a16:creationId xmlns:a16="http://schemas.microsoft.com/office/drawing/2014/main" id="{4DD69371-5432-4834-A563-E6EFFA57AD26}"/>
+              </a:ext>
+            </a:extLst>
+          </p:cNvPr>
+          <p:cNvSpPr/>
+          <p:nvPr/>
+        </p:nvSpPr>
+        <p:spPr>
+          <a:xfrm>
+            <a:off x="1374777" y="1441688"/>
+            <a:ext cx="824265" cy="400110"/>
+          </a:xfrm>
+          <a:prstGeom prst="rect">
+            <a:avLst/>
+          </a:prstGeom>
+        </p:spPr>
+        <p:txBody>
+          <a:bodyPr wrap="none">
+            <a:spAutoFit/>
+          </a:bodyPr>
+          <a:lstStyle/>
+          <a:p>
+            <a:r>
+              <a:rPr lang="en-US" sz="2000" dirty="0"/>
+              <a:t>Class?</a:t>
+            </a:r>
+          </a:p>
+        </p:txBody>
+      </p:sp>
+      <p:sp>
+        <p:nvSpPr>
+          <p:cNvPr id="5" name="Rectangle 4">
+            <a:extLst>
+              <a:ext uri="{FF2B5EF4-FFF2-40B4-BE49-F238E27FC236}">
+                <a16:creationId xmlns:a16="http://schemas.microsoft.com/office/drawing/2014/main" id="{6A796A6A-A667-44DB-A6EB-AB979FA88D87}"/>
+              </a:ext>
+            </a:extLst>
+          </p:cNvPr>
+          <p:cNvSpPr/>
+          <p:nvPr/>
+        </p:nvSpPr>
+        <p:spPr>
+          <a:xfrm>
+            <a:off x="617349" y="1900245"/>
+            <a:ext cx="4572000" cy="1477328"/>
+          </a:xfrm>
+          <a:prstGeom prst="rect">
+            <a:avLst/>
+          </a:prstGeom>
+        </p:spPr>
+        <p:txBody>
+          <a:bodyPr>
+            <a:spAutoFit/>
+          </a:bodyPr>
+          <a:lstStyle/>
+          <a:p>
+            <a:r>
+              <a:rPr lang="en-US" dirty="0"/>
+              <a:t>A class is a blueprint or template used to create objects.</a:t>
+            </a:r>
+          </a:p>
+          <a:p>
+            <a:r>
+              <a:rPr lang="en-US" dirty="0"/>
+              <a:t>Think of a class as an architectural plan.</a:t>
+            </a:r>
+          </a:p>
+          <a:p>
+            <a:r>
+              <a:rPr lang="en-US" dirty="0"/>
+              <a:t>The plan is </a:t>
+            </a:r>
+            <a:r>
+              <a:rPr lang="en-US" b="1" dirty="0"/>
+              <a:t>not</a:t>
+            </a:r>
+            <a:r>
+              <a:rPr lang="en-US" dirty="0"/>
+              <a:t> the house.</a:t>
+            </a:r>
+          </a:p>
+          <a:p>
+            <a:r>
+              <a:rPr lang="en-US" dirty="0"/>
+              <a:t>It is used to build many houses.</a:t>
+            </a:r>
+          </a:p>
+        </p:txBody>
+      </p:sp>
+      <p:sp>
+        <p:nvSpPr>
+          <p:cNvPr id="6" name="Rectangle 5">
+            <a:extLst>
+              <a:ext uri="{FF2B5EF4-FFF2-40B4-BE49-F238E27FC236}">
+                <a16:creationId xmlns:a16="http://schemas.microsoft.com/office/drawing/2014/main" id="{18EDE950-C6FC-47B4-9A0E-7B4A1DF5B7AC}"/>
+              </a:ext>
+            </a:extLst>
+          </p:cNvPr>
+          <p:cNvSpPr/>
+          <p:nvPr/>
+        </p:nvSpPr>
+        <p:spPr>
+          <a:xfrm>
+            <a:off x="6544654" y="1472466"/>
+            <a:ext cx="910827" cy="369332"/>
+          </a:xfrm>
+          <a:prstGeom prst="rect">
+            <a:avLst/>
+          </a:prstGeom>
+        </p:spPr>
+        <p:txBody>
+          <a:bodyPr wrap="none">
+            <a:spAutoFit/>
+          </a:bodyPr>
+          <a:lstStyle/>
+          <a:p>
+            <a:r>
+              <a:rPr lang="en-US" dirty="0"/>
+              <a:t>Object?</a:t>
+            </a:r>
+          </a:p>
+        </p:txBody>
+      </p:sp>
+      <p:sp>
+        <p:nvSpPr>
+          <p:cNvPr id="7" name="Rectangle 6">
+            <a:extLst>
+              <a:ext uri="{FF2B5EF4-FFF2-40B4-BE49-F238E27FC236}">
+                <a16:creationId xmlns:a16="http://schemas.microsoft.com/office/drawing/2014/main" id="{E0439004-7843-4BE8-AF90-246DDD8A018B}"/>
+              </a:ext>
+            </a:extLst>
+          </p:cNvPr>
+          <p:cNvSpPr/>
+          <p:nvPr/>
+        </p:nvSpPr>
+        <p:spPr>
+          <a:xfrm>
+            <a:off x="5577190" y="2158462"/>
+            <a:ext cx="3427325" cy="646331"/>
+          </a:xfrm>
+          <a:prstGeom prst="rect">
+            <a:avLst/>
+          </a:prstGeom>
+        </p:spPr>
+        <p:txBody>
+          <a:bodyPr wrap="square">
+            <a:spAutoFit/>
+          </a:bodyPr>
+          <a:lstStyle/>
+          <a:p>
+            <a:r>
+              <a:rPr lang="en-US" dirty="0"/>
+              <a:t>An object is an actual instance created from a class.</a:t>
+            </a:r>
+          </a:p>
+        </p:txBody>
+      </p:sp>
+    </p:spTree>
+    <p:extLst>
+      <p:ext uri="{BB962C8B-B14F-4D97-AF65-F5344CB8AC3E}">
+        <p14:creationId xmlns:p14="http://schemas.microsoft.com/office/powerpoint/2010/main" val="1659408146"/>
+      </p:ext>
+    </p:extLst>
+  </p:cSld>
+  <p:clrMapOvr>
+    <a:masterClrMapping/>
+  </p:clrMapOvr>
+</p:sld>
+</file>
+
 <file path=ppt/slides/slide9.xml><?xml version="1.0" encoding="utf-8"?>
 <p:sld xmlns:a="http://schemas.openxmlformats.org/drawingml/2006/main" xmlns:r="http://schemas.openxmlformats.org/officeDocument/2006/relationships" xmlns:p="http://schemas.openxmlformats.org/presentationml/2006/main">
   <p:cSld>
@@ -5373,206 +5714,40 @@
           <a:chExt cx="0" cy="0"/>
         </a:xfrm>
       </p:grpSpPr>
-      <p:sp>
-        <p:nvSpPr>
-          <p:cNvPr id="3" name="Rectangle 2">
-            <a:extLst>
-              <a:ext uri="{FF2B5EF4-FFF2-40B4-BE49-F238E27FC236}">
-                <a16:creationId xmlns:a16="http://schemas.microsoft.com/office/drawing/2014/main" id="{A7297B1F-75BE-43C2-9DE4-7B5A29C24859}"/>
-              </a:ext>
-            </a:extLst>
-          </p:cNvPr>
-          <p:cNvSpPr/>
+      <p:pic>
+        <p:nvPicPr>
+          <p:cNvPr id="3" name="Image 2">
+            <a:extLst>
+              <a:ext uri="{FF2B5EF4-FFF2-40B4-BE49-F238E27FC236}">
+                <a16:creationId xmlns:a16="http://schemas.microsoft.com/office/drawing/2014/main" id="{F5006178-7923-46F5-87AB-C864D696B01A}"/>
+              </a:ext>
+            </a:extLst>
+          </p:cNvPr>
+          <p:cNvPicPr>
+            <a:picLocks noChangeAspect="1"/>
+          </p:cNvPicPr>
           <p:nvPr/>
-        </p:nvSpPr>
+        </p:nvPicPr>
+        <p:blipFill>
+          <a:blip r:embed="rId2"/>
+          <a:stretch>
+            <a:fillRect/>
+          </a:stretch>
+        </p:blipFill>
         <p:spPr>
           <a:xfrm>
-            <a:off x="805320" y="573782"/>
-            <a:ext cx="2994731" cy="461665"/>
+            <a:off x="0" y="75902"/>
+            <a:ext cx="9144000" cy="4991695"/>
           </a:xfrm>
           <a:prstGeom prst="rect">
             <a:avLst/>
           </a:prstGeom>
         </p:spPr>
-        <p:txBody>
-          <a:bodyPr wrap="none">
-            <a:spAutoFit/>
-          </a:bodyPr>
-          <a:lstStyle/>
-          <a:p>
-            <a:r>
-              <a:rPr lang="en-US" sz="2400" b="1" dirty="0"/>
-              <a:t>3. Objects and Classes</a:t>
-            </a:r>
-          </a:p>
-        </p:txBody>
-      </p:sp>
-      <p:sp>
-        <p:nvSpPr>
-          <p:cNvPr id="4" name="Rectangle 3">
-            <a:extLst>
-              <a:ext uri="{FF2B5EF4-FFF2-40B4-BE49-F238E27FC236}">
-                <a16:creationId xmlns:a16="http://schemas.microsoft.com/office/drawing/2014/main" id="{4DD69371-5432-4834-A563-E6EFFA57AD26}"/>
-              </a:ext>
-            </a:extLst>
-          </p:cNvPr>
-          <p:cNvSpPr/>
-          <p:nvPr/>
-        </p:nvSpPr>
-        <p:spPr>
-          <a:xfrm>
-            <a:off x="1374777" y="1441688"/>
-            <a:ext cx="824265" cy="400110"/>
-          </a:xfrm>
-          <a:prstGeom prst="rect">
-            <a:avLst/>
-          </a:prstGeom>
-        </p:spPr>
-        <p:txBody>
-          <a:bodyPr wrap="none">
-            <a:spAutoFit/>
-          </a:bodyPr>
-          <a:lstStyle/>
-          <a:p>
-            <a:r>
-              <a:rPr lang="en-US" sz="2000" dirty="0"/>
-              <a:t>Class?</a:t>
-            </a:r>
-          </a:p>
-        </p:txBody>
-      </p:sp>
-      <p:sp>
-        <p:nvSpPr>
-          <p:cNvPr id="5" name="Rectangle 4">
-            <a:extLst>
-              <a:ext uri="{FF2B5EF4-FFF2-40B4-BE49-F238E27FC236}">
-                <a16:creationId xmlns:a16="http://schemas.microsoft.com/office/drawing/2014/main" id="{6A796A6A-A667-44DB-A6EB-AB979FA88D87}"/>
-              </a:ext>
-            </a:extLst>
-          </p:cNvPr>
-          <p:cNvSpPr/>
-          <p:nvPr/>
-        </p:nvSpPr>
-        <p:spPr>
-          <a:xfrm>
-            <a:off x="617349" y="1900245"/>
-            <a:ext cx="4572000" cy="1477328"/>
-          </a:xfrm>
-          <a:prstGeom prst="rect">
-            <a:avLst/>
-          </a:prstGeom>
-        </p:spPr>
-        <p:txBody>
-          <a:bodyPr>
-            <a:spAutoFit/>
-          </a:bodyPr>
-          <a:lstStyle/>
-          <a:p>
-            <a:r>
-              <a:rPr lang="en-US" dirty="0"/>
-              <a:t>A class is a blueprint or template used to create objects.</a:t>
-            </a:r>
-          </a:p>
-          <a:p>
-            <a:r>
-              <a:rPr lang="en-US" dirty="0"/>
-              <a:t>Think of a class as an architectural plan.</a:t>
-            </a:r>
-          </a:p>
-          <a:p>
-            <a:r>
-              <a:rPr lang="en-US" dirty="0"/>
-              <a:t>The plan is </a:t>
-            </a:r>
-            <a:r>
-              <a:rPr lang="en-US" b="1" dirty="0"/>
-              <a:t>not</a:t>
-            </a:r>
-            <a:r>
-              <a:rPr lang="en-US" dirty="0"/>
-              <a:t> the house.</a:t>
-            </a:r>
-          </a:p>
-          <a:p>
-            <a:r>
-              <a:rPr lang="en-US" dirty="0"/>
-              <a:t>It is used to build many houses.</a:t>
-            </a:r>
-          </a:p>
-        </p:txBody>
-      </p:sp>
-      <p:sp>
-        <p:nvSpPr>
-          <p:cNvPr id="6" name="Rectangle 5">
-            <a:extLst>
-              <a:ext uri="{FF2B5EF4-FFF2-40B4-BE49-F238E27FC236}">
-                <a16:creationId xmlns:a16="http://schemas.microsoft.com/office/drawing/2014/main" id="{18EDE950-C6FC-47B4-9A0E-7B4A1DF5B7AC}"/>
-              </a:ext>
-            </a:extLst>
-          </p:cNvPr>
-          <p:cNvSpPr/>
-          <p:nvPr/>
-        </p:nvSpPr>
-        <p:spPr>
-          <a:xfrm>
-            <a:off x="6544654" y="1472466"/>
-            <a:ext cx="910827" cy="369332"/>
-          </a:xfrm>
-          <a:prstGeom prst="rect">
-            <a:avLst/>
-          </a:prstGeom>
-        </p:spPr>
-        <p:txBody>
-          <a:bodyPr wrap="none">
-            <a:spAutoFit/>
-          </a:bodyPr>
-          <a:lstStyle/>
-          <a:p>
-            <a:r>
-              <a:rPr lang="en-US" dirty="0"/>
-              <a:t>Object?</a:t>
-            </a:r>
-          </a:p>
-        </p:txBody>
-      </p:sp>
-      <p:sp>
-        <p:nvSpPr>
-          <p:cNvPr id="7" name="Rectangle 6">
-            <a:extLst>
-              <a:ext uri="{FF2B5EF4-FFF2-40B4-BE49-F238E27FC236}">
-                <a16:creationId xmlns:a16="http://schemas.microsoft.com/office/drawing/2014/main" id="{E0439004-7843-4BE8-AF90-246DDD8A018B}"/>
-              </a:ext>
-            </a:extLst>
-          </p:cNvPr>
-          <p:cNvSpPr/>
-          <p:nvPr/>
-        </p:nvSpPr>
-        <p:spPr>
-          <a:xfrm>
-            <a:off x="5577190" y="2158462"/>
-            <a:ext cx="3427325" cy="646331"/>
-          </a:xfrm>
-          <a:prstGeom prst="rect">
-            <a:avLst/>
-          </a:prstGeom>
-        </p:spPr>
-        <p:txBody>
-          <a:bodyPr wrap="square">
-            <a:spAutoFit/>
-          </a:bodyPr>
-          <a:lstStyle/>
-          <a:p>
-            <a:r>
-              <a:rPr lang="en-US" dirty="0"/>
-              <a:t>An object is an actual instance created from a class.</a:t>
-            </a:r>
-          </a:p>
-        </p:txBody>
-      </p:sp>
+      </p:pic>
     </p:spTree>
     <p:extLst>
       <p:ext uri="{BB962C8B-B14F-4D97-AF65-F5344CB8AC3E}">
-        <p14:creationId xmlns:p14="http://schemas.microsoft.com/office/powerpoint/2010/main" val="1659408146"/>
+        <p14:creationId xmlns:p14="http://schemas.microsoft.com/office/powerpoint/2010/main" val="2312019106"/>
       </p:ext>
     </p:extLst>
   </p:cSld>

--- a/course/course8.pptx
+++ b/course/course8.pptx
@@ -5,20 +5,18 @@
     <p:sldMasterId id="2147483825" r:id="rId1"/>
   </p:sldMasterIdLst>
   <p:notesMasterIdLst>
-    <p:notesMasterId r:id="rId13"/>
+    <p:notesMasterId r:id="rId11"/>
   </p:notesMasterIdLst>
   <p:sldIdLst>
     <p:sldId id="256" r:id="rId2"/>
     <p:sldId id="279" r:id="rId3"/>
-    <p:sldId id="281" r:id="rId4"/>
-    <p:sldId id="280" r:id="rId5"/>
+    <p:sldId id="280" r:id="rId4"/>
+    <p:sldId id="281" r:id="rId5"/>
     <p:sldId id="282" r:id="rId6"/>
-    <p:sldId id="284" r:id="rId7"/>
-    <p:sldId id="285" r:id="rId8"/>
-    <p:sldId id="286" r:id="rId9"/>
-    <p:sldId id="287" r:id="rId10"/>
-    <p:sldId id="288" r:id="rId11"/>
-    <p:sldId id="289" r:id="rId12"/>
+    <p:sldId id="283" r:id="rId7"/>
+    <p:sldId id="284" r:id="rId8"/>
+    <p:sldId id="285" r:id="rId9"/>
+    <p:sldId id="286" r:id="rId10"/>
   </p:sldIdLst>
   <p:sldSz cx="9144000" cy="5143500" type="screen16x9"/>
   <p:notesSz cx="6858000" cy="9144000"/>
@@ -219,7 +217,7 @@
           <a:p>
             <a:fld id="{B157FD80-104E-477A-84DF-AAA7C9A1979B}" type="datetimeFigureOut">
               <a:rPr lang="en-ZA" smtClean="0"/>
-              <a:t>2026/07/09</a:t>
+              <a:t>2026/07/10</a:t>
             </a:fld>
             <a:endParaRPr lang="en-ZA"/>
           </a:p>
@@ -636,7 +634,7 @@
           <a:p>
             <a:fld id="{8353421B-4862-4D3A-B9AB-BA663EF3CA0D}" type="datetimeFigureOut">
               <a:rPr lang="en-ZA" smtClean="0"/>
-              <a:t>2026/07/09</a:t>
+              <a:t>2026/07/10</a:t>
             </a:fld>
             <a:endParaRPr lang="en-ZA"/>
           </a:p>
@@ -836,7 +834,7 @@
           <a:p>
             <a:fld id="{8353421B-4862-4D3A-B9AB-BA663EF3CA0D}" type="datetimeFigureOut">
               <a:rPr lang="en-ZA" smtClean="0"/>
-              <a:t>2026/07/09</a:t>
+              <a:t>2026/07/10</a:t>
             </a:fld>
             <a:endParaRPr lang="en-ZA"/>
           </a:p>
@@ -1046,7 +1044,7 @@
           <a:p>
             <a:fld id="{8353421B-4862-4D3A-B9AB-BA663EF3CA0D}" type="datetimeFigureOut">
               <a:rPr lang="en-ZA" smtClean="0"/>
-              <a:t>2026/07/09</a:t>
+              <a:t>2026/07/10</a:t>
             </a:fld>
             <a:endParaRPr lang="en-ZA"/>
           </a:p>
@@ -1527,7 +1525,7 @@
           <a:p>
             <a:fld id="{8353421B-4862-4D3A-B9AB-BA663EF3CA0D}" type="datetimeFigureOut">
               <a:rPr lang="en-ZA" smtClean="0"/>
-              <a:t>2026/07/09</a:t>
+              <a:t>2026/07/10</a:t>
             </a:fld>
             <a:endParaRPr lang="en-ZA"/>
           </a:p>
@@ -1803,7 +1801,7 @@
           <a:p>
             <a:fld id="{8353421B-4862-4D3A-B9AB-BA663EF3CA0D}" type="datetimeFigureOut">
               <a:rPr lang="en-ZA" smtClean="0"/>
-              <a:t>2026/07/09</a:t>
+              <a:t>2026/07/10</a:t>
             </a:fld>
             <a:endParaRPr lang="en-ZA"/>
           </a:p>
@@ -2071,7 +2069,7 @@
           <a:p>
             <a:fld id="{8353421B-4862-4D3A-B9AB-BA663EF3CA0D}" type="datetimeFigureOut">
               <a:rPr lang="en-ZA" smtClean="0"/>
-              <a:t>2026/07/09</a:t>
+              <a:t>2026/07/10</a:t>
             </a:fld>
             <a:endParaRPr lang="en-ZA"/>
           </a:p>
@@ -2486,7 +2484,7 @@
           <a:p>
             <a:fld id="{8353421B-4862-4D3A-B9AB-BA663EF3CA0D}" type="datetimeFigureOut">
               <a:rPr lang="en-ZA" smtClean="0"/>
-              <a:t>2026/07/09</a:t>
+              <a:t>2026/07/10</a:t>
             </a:fld>
             <a:endParaRPr lang="en-ZA"/>
           </a:p>
@@ -2628,7 +2626,7 @@
           <a:p>
             <a:fld id="{8353421B-4862-4D3A-B9AB-BA663EF3CA0D}" type="datetimeFigureOut">
               <a:rPr lang="en-ZA" smtClean="0"/>
-              <a:t>2026/07/09</a:t>
+              <a:t>2026/07/10</a:t>
             </a:fld>
             <a:endParaRPr lang="en-ZA"/>
           </a:p>
@@ -2741,7 +2739,7 @@
           <a:p>
             <a:fld id="{8353421B-4862-4D3A-B9AB-BA663EF3CA0D}" type="datetimeFigureOut">
               <a:rPr lang="en-ZA" smtClean="0"/>
-              <a:t>2026/07/09</a:t>
+              <a:t>2026/07/10</a:t>
             </a:fld>
             <a:endParaRPr lang="en-ZA"/>
           </a:p>
@@ -3054,7 +3052,7 @@
           <a:p>
             <a:fld id="{8353421B-4862-4D3A-B9AB-BA663EF3CA0D}" type="datetimeFigureOut">
               <a:rPr lang="en-ZA" smtClean="0"/>
-              <a:t>2026/07/09</a:t>
+              <a:t>2026/07/10</a:t>
             </a:fld>
             <a:endParaRPr lang="en-ZA"/>
           </a:p>
@@ -3343,7 +3341,7 @@
           <a:p>
             <a:fld id="{8353421B-4862-4D3A-B9AB-BA663EF3CA0D}" type="datetimeFigureOut">
               <a:rPr lang="en-ZA" smtClean="0"/>
-              <a:t>2026/07/09</a:t>
+              <a:t>2026/07/10</a:t>
             </a:fld>
             <a:endParaRPr lang="en-ZA"/>
           </a:p>
@@ -3596,7 +3594,7 @@
           <a:p>
             <a:fld id="{8353421B-4862-4D3A-B9AB-BA663EF3CA0D}" type="datetimeFigureOut">
               <a:rPr lang="en-ZA" smtClean="0"/>
-              <a:t>2026/07/09</a:t>
+              <a:t>2026/07/10</a:t>
             </a:fld>
             <a:endParaRPr lang="en-ZA"/>
           </a:p>
@@ -4098,303 +4096,6 @@
 </p:sld>
 </file>
 
-<file path=ppt/slides/slide10.xml><?xml version="1.0" encoding="utf-8"?>
-<p:sld xmlns:a="http://schemas.openxmlformats.org/drawingml/2006/main" xmlns:r="http://schemas.openxmlformats.org/officeDocument/2006/relationships" xmlns:p="http://schemas.openxmlformats.org/presentationml/2006/main">
-  <p:cSld>
-    <p:spTree>
-      <p:nvGrpSpPr>
-        <p:cNvPr id="1" name=""/>
-        <p:cNvGrpSpPr/>
-        <p:nvPr/>
-      </p:nvGrpSpPr>
-      <p:grpSpPr>
-        <a:xfrm>
-          <a:off x="0" y="0"/>
-          <a:ext cx="0" cy="0"/>
-          <a:chOff x="0" y="0"/>
-          <a:chExt cx="0" cy="0"/>
-        </a:xfrm>
-      </p:grpSpPr>
-      <p:pic>
-        <p:nvPicPr>
-          <p:cNvPr id="2" name="Image 1">
-            <a:extLst>
-              <a:ext uri="{FF2B5EF4-FFF2-40B4-BE49-F238E27FC236}">
-                <a16:creationId xmlns:a16="http://schemas.microsoft.com/office/drawing/2014/main" id="{C6092D18-FCE6-4C86-A147-E2D332D7659A}"/>
-              </a:ext>
-            </a:extLst>
-          </p:cNvPr>
-          <p:cNvPicPr>
-            <a:picLocks noChangeAspect="1"/>
-          </p:cNvPicPr>
-          <p:nvPr/>
-        </p:nvPicPr>
-        <p:blipFill>
-          <a:blip r:embed="rId2"/>
-          <a:stretch>
-            <a:fillRect/>
-          </a:stretch>
-        </p:blipFill>
-        <p:spPr>
-          <a:xfrm>
-            <a:off x="558593" y="25269"/>
-            <a:ext cx="8026813" cy="5092962"/>
-          </a:xfrm>
-          <a:prstGeom prst="rect">
-            <a:avLst/>
-          </a:prstGeom>
-        </p:spPr>
-      </p:pic>
-      <p:cxnSp>
-        <p:nvCxnSpPr>
-          <p:cNvPr id="4" name="Connecteur droit avec flèche 3">
-            <a:extLst>
-              <a:ext uri="{FF2B5EF4-FFF2-40B4-BE49-F238E27FC236}">
-                <a16:creationId xmlns:a16="http://schemas.microsoft.com/office/drawing/2014/main" id="{01B8E967-882A-4C79-8DC7-540F7B71FFD5}"/>
-              </a:ext>
-            </a:extLst>
-          </p:cNvPr>
-          <p:cNvCxnSpPr>
-            <a:cxnSpLocks/>
-            <a:stCxn id="5" idx="1"/>
-          </p:cNvCxnSpPr>
-          <p:nvPr/>
-        </p:nvCxnSpPr>
-        <p:spPr>
-          <a:xfrm flipH="1" flipV="1">
-            <a:off x="5304532" y="3753587"/>
-            <a:ext cx="388998" cy="311502"/>
-          </a:xfrm>
-          <a:prstGeom prst="straightConnector1">
-            <a:avLst/>
-          </a:prstGeom>
-          <a:ln w="57150">
-            <a:tailEnd type="triangle"/>
-          </a:ln>
-        </p:spPr>
-        <p:style>
-          <a:lnRef idx="1">
-            <a:schemeClr val="accent1"/>
-          </a:lnRef>
-          <a:fillRef idx="0">
-            <a:schemeClr val="accent1"/>
-          </a:fillRef>
-          <a:effectRef idx="0">
-            <a:schemeClr val="accent1"/>
-          </a:effectRef>
-          <a:fontRef idx="minor">
-            <a:schemeClr val="tx1"/>
-          </a:fontRef>
-        </p:style>
-      </p:cxnSp>
-      <p:sp>
-        <p:nvSpPr>
-          <p:cNvPr id="5" name="ZoneTexte 4">
-            <a:extLst>
-              <a:ext uri="{FF2B5EF4-FFF2-40B4-BE49-F238E27FC236}">
-                <a16:creationId xmlns:a16="http://schemas.microsoft.com/office/drawing/2014/main" id="{BCB798A9-0F8A-4F10-9211-46877E78735D}"/>
-              </a:ext>
-            </a:extLst>
-          </p:cNvPr>
-          <p:cNvSpPr txBox="1"/>
-          <p:nvPr/>
-        </p:nvSpPr>
-        <p:spPr>
-          <a:xfrm>
-            <a:off x="5693530" y="3803479"/>
-            <a:ext cx="1651982" cy="523220"/>
-          </a:xfrm>
-          <a:prstGeom prst="rect">
-            <a:avLst/>
-          </a:prstGeom>
-          <a:noFill/>
-        </p:spPr>
-        <p:txBody>
-          <a:bodyPr wrap="square" rtlCol="0">
-            <a:spAutoFit/>
-          </a:bodyPr>
-          <a:lstStyle/>
-          <a:p>
-            <a:r>
-              <a:rPr lang="en-US" sz="2800" dirty="0">
-                <a:ln w="0"/>
-                <a:solidFill>
-                  <a:schemeClr val="accent1"/>
-                </a:solidFill>
-                <a:effectLst>
-                  <a:outerShdw blurRad="38100" dist="25400" dir="5400000" algn="ctr" rotWithShape="0">
-                    <a:srgbClr val="6E747A">
-                      <a:alpha val="43000"/>
-                    </a:srgbClr>
-                  </a:outerShdw>
-                </a:effectLst>
-              </a:rPr>
-              <a:t>Object </a:t>
-            </a:r>
-          </a:p>
-        </p:txBody>
-      </p:sp>
-      <p:sp>
-        <p:nvSpPr>
-          <p:cNvPr id="6" name="ZoneTexte 5">
-            <a:extLst>
-              <a:ext uri="{FF2B5EF4-FFF2-40B4-BE49-F238E27FC236}">
-                <a16:creationId xmlns:a16="http://schemas.microsoft.com/office/drawing/2014/main" id="{50A7E568-66C6-43B8-AEB0-A7E55618A3A7}"/>
-              </a:ext>
-            </a:extLst>
-          </p:cNvPr>
-          <p:cNvSpPr txBox="1"/>
-          <p:nvPr/>
-        </p:nvSpPr>
-        <p:spPr>
-          <a:xfrm>
-            <a:off x="6401642" y="1705525"/>
-            <a:ext cx="1651982" cy="523220"/>
-          </a:xfrm>
-          <a:prstGeom prst="rect">
-            <a:avLst/>
-          </a:prstGeom>
-          <a:noFill/>
-        </p:spPr>
-        <p:txBody>
-          <a:bodyPr wrap="square" rtlCol="0">
-            <a:spAutoFit/>
-          </a:bodyPr>
-          <a:lstStyle/>
-          <a:p>
-            <a:r>
-              <a:rPr lang="en-US" sz="2800" dirty="0">
-                <a:ln w="0"/>
-                <a:solidFill>
-                  <a:schemeClr val="accent1"/>
-                </a:solidFill>
-                <a:effectLst>
-                  <a:outerShdw blurRad="38100" dist="25400" dir="5400000" algn="ctr" rotWithShape="0">
-                    <a:srgbClr val="6E747A">
-                      <a:alpha val="43000"/>
-                    </a:srgbClr>
-                  </a:outerShdw>
-                </a:effectLst>
-              </a:rPr>
-              <a:t>cl</a:t>
-            </a:r>
-            <a:r>
-              <a:rPr lang="fr-FR" sz="2800" dirty="0" err="1">
-                <a:ln w="0"/>
-                <a:solidFill>
-                  <a:schemeClr val="accent1"/>
-                </a:solidFill>
-                <a:effectLst>
-                  <a:outerShdw blurRad="38100" dist="25400" dir="5400000" algn="ctr" rotWithShape="0">
-                    <a:srgbClr val="6E747A">
-                      <a:alpha val="43000"/>
-                    </a:srgbClr>
-                  </a:outerShdw>
-                </a:effectLst>
-              </a:rPr>
-              <a:t>ass</a:t>
-            </a:r>
-            <a:endParaRPr lang="en-US" sz="2800" dirty="0">
-              <a:ln w="0"/>
-              <a:solidFill>
-                <a:schemeClr val="accent1"/>
-              </a:solidFill>
-              <a:effectLst>
-                <a:outerShdw blurRad="38100" dist="25400" dir="5400000" algn="ctr" rotWithShape="0">
-                  <a:srgbClr val="6E747A">
-                    <a:alpha val="43000"/>
-                  </a:srgbClr>
-                </a:outerShdw>
-              </a:effectLst>
-            </a:endParaRPr>
-          </a:p>
-        </p:txBody>
-      </p:sp>
-      <p:cxnSp>
-        <p:nvCxnSpPr>
-          <p:cNvPr id="8" name="Connecteur droit avec flèche 7">
-            <a:extLst>
-              <a:ext uri="{FF2B5EF4-FFF2-40B4-BE49-F238E27FC236}">
-                <a16:creationId xmlns:a16="http://schemas.microsoft.com/office/drawing/2014/main" id="{8E4DEE71-677E-4F78-B3F7-04DBCD5D7911}"/>
-              </a:ext>
-            </a:extLst>
-          </p:cNvPr>
-          <p:cNvCxnSpPr>
-            <a:cxnSpLocks/>
-            <a:stCxn id="6" idx="1"/>
-          </p:cNvCxnSpPr>
-          <p:nvPr/>
-        </p:nvCxnSpPr>
-        <p:spPr>
-          <a:xfrm flipH="1">
-            <a:off x="5519240" y="1967135"/>
-            <a:ext cx="882402" cy="105859"/>
-          </a:xfrm>
-          <a:prstGeom prst="straightConnector1">
-            <a:avLst/>
-          </a:prstGeom>
-          <a:ln w="57150">
-            <a:tailEnd type="triangle"/>
-          </a:ln>
-        </p:spPr>
-        <p:style>
-          <a:lnRef idx="1">
-            <a:schemeClr val="accent1"/>
-          </a:lnRef>
-          <a:fillRef idx="0">
-            <a:schemeClr val="accent1"/>
-          </a:fillRef>
-          <a:effectRef idx="0">
-            <a:schemeClr val="accent1"/>
-          </a:effectRef>
-          <a:fontRef idx="minor">
-            <a:schemeClr val="tx1"/>
-          </a:fontRef>
-        </p:style>
-      </p:cxnSp>
-    </p:spTree>
-    <p:extLst>
-      <p:ext uri="{BB962C8B-B14F-4D97-AF65-F5344CB8AC3E}">
-        <p14:creationId xmlns:p14="http://schemas.microsoft.com/office/powerpoint/2010/main" val="3308118012"/>
-      </p:ext>
-    </p:extLst>
-  </p:cSld>
-  <p:clrMapOvr>
-    <a:masterClrMapping/>
-  </p:clrMapOvr>
-</p:sld>
-</file>
-
-<file path=ppt/slides/slide11.xml><?xml version="1.0" encoding="utf-8"?>
-<p:sld xmlns:a="http://schemas.openxmlformats.org/drawingml/2006/main" xmlns:r="http://schemas.openxmlformats.org/officeDocument/2006/relationships" xmlns:p="http://schemas.openxmlformats.org/presentationml/2006/main">
-  <p:cSld>
-    <p:spTree>
-      <p:nvGrpSpPr>
-        <p:cNvPr id="1" name=""/>
-        <p:cNvGrpSpPr/>
-        <p:nvPr/>
-      </p:nvGrpSpPr>
-      <p:grpSpPr>
-        <a:xfrm>
-          <a:off x="0" y="0"/>
-          <a:ext cx="0" cy="0"/>
-          <a:chOff x="0" y="0"/>
-          <a:chExt cx="0" cy="0"/>
-        </a:xfrm>
-      </p:grpSpPr>
-    </p:spTree>
-    <p:extLst>
-      <p:ext uri="{BB962C8B-B14F-4D97-AF65-F5344CB8AC3E}">
-        <p14:creationId xmlns:p14="http://schemas.microsoft.com/office/powerpoint/2010/main" val="1132406673"/>
-      </p:ext>
-    </p:extLst>
-  </p:cSld>
-  <p:clrMapOvr>
-    <a:masterClrMapping/>
-  </p:clrMapOvr>
-</p:sld>
-</file>
-
 <file path=ppt/slides/slide2.xml><?xml version="1.0" encoding="utf-8"?>
 <p:sld xmlns:a="http://schemas.openxmlformats.org/drawingml/2006/main" xmlns:r="http://schemas.openxmlformats.org/officeDocument/2006/relationships" xmlns:p="http://schemas.openxmlformats.org/presentationml/2006/main">
   <p:cSld>
@@ -4524,40 +4225,180 @@
           <a:chExt cx="0" cy="0"/>
         </a:xfrm>
       </p:grpSpPr>
-      <p:pic>
-        <p:nvPicPr>
-          <p:cNvPr id="2" name="Image 1">
-            <a:extLst>
-              <a:ext uri="{FF2B5EF4-FFF2-40B4-BE49-F238E27FC236}">
-                <a16:creationId xmlns:a16="http://schemas.microsoft.com/office/drawing/2014/main" id="{43CCEC33-3D91-4C36-8EDA-11EE5B2FCA7E}"/>
-              </a:ext>
-            </a:extLst>
-          </p:cNvPr>
-          <p:cNvPicPr>
-            <a:picLocks noChangeAspect="1"/>
-          </p:cNvPicPr>
+      <p:sp>
+        <p:nvSpPr>
+          <p:cNvPr id="2" name="Rectangle 1">
+            <a:extLst>
+              <a:ext uri="{FF2B5EF4-FFF2-40B4-BE49-F238E27FC236}">
+                <a16:creationId xmlns:a16="http://schemas.microsoft.com/office/drawing/2014/main" id="{A78FC43D-9BB3-465D-B35C-BE5524AF4B49}"/>
+              </a:ext>
+            </a:extLst>
+          </p:cNvPr>
+          <p:cNvSpPr/>
           <p:nvPr/>
-        </p:nvPicPr>
-        <p:blipFill>
-          <a:blip r:embed="rId2"/>
-          <a:stretch>
-            <a:fillRect/>
-          </a:stretch>
-        </p:blipFill>
+        </p:nvSpPr>
         <p:spPr>
           <a:xfrm>
-            <a:off x="1721210" y="754648"/>
-            <a:ext cx="5488317" cy="3534444"/>
+            <a:off x="577796" y="476526"/>
+            <a:ext cx="2190856" cy="400110"/>
           </a:xfrm>
           <a:prstGeom prst="rect">
             <a:avLst/>
           </a:prstGeom>
         </p:spPr>
-      </p:pic>
+        <p:txBody>
+          <a:bodyPr wrap="none">
+            <a:spAutoFit/>
+          </a:bodyPr>
+          <a:lstStyle/>
+          <a:p>
+            <a:r>
+              <a:rPr lang="en-US" sz="2000" b="1" dirty="0"/>
+              <a:t>What is an Object?</a:t>
+            </a:r>
+          </a:p>
+        </p:txBody>
+      </p:sp>
+      <p:sp>
+        <p:nvSpPr>
+          <p:cNvPr id="4" name="Rectangle 3">
+            <a:extLst>
+              <a:ext uri="{FF2B5EF4-FFF2-40B4-BE49-F238E27FC236}">
+                <a16:creationId xmlns:a16="http://schemas.microsoft.com/office/drawing/2014/main" id="{3F90CDAE-490A-4CCC-A5CA-485C74A1CABC}"/>
+              </a:ext>
+            </a:extLst>
+          </p:cNvPr>
+          <p:cNvSpPr/>
+          <p:nvPr/>
+        </p:nvSpPr>
+        <p:spPr>
+          <a:xfrm>
+            <a:off x="1621013" y="1140589"/>
+            <a:ext cx="4572000" cy="2862322"/>
+          </a:xfrm>
+          <a:prstGeom prst="rect">
+            <a:avLst/>
+          </a:prstGeom>
+        </p:spPr>
+        <p:txBody>
+          <a:bodyPr>
+            <a:spAutoFit/>
+          </a:bodyPr>
+          <a:lstStyle/>
+          <a:p>
+            <a:r>
+              <a:rPr lang="en-US" dirty="0"/>
+              <a:t>An </a:t>
+            </a:r>
+            <a:r>
+              <a:rPr lang="en-US" b="1" dirty="0"/>
+              <a:t>object</a:t>
+            </a:r>
+            <a:r>
+              <a:rPr lang="en-US" dirty="0"/>
+              <a:t> is anything that has:</a:t>
+            </a:r>
+          </a:p>
+          <a:p>
+            <a:pPr lvl="1"/>
+            <a:r>
+              <a:rPr lang="en-US" dirty="0"/>
+              <a:t>✅ </a:t>
+            </a:r>
+            <a:r>
+              <a:rPr lang="en-US" b="1" dirty="0"/>
+              <a:t>Attributes (Variables)</a:t>
+            </a:r>
+            <a:endParaRPr lang="en-US" dirty="0"/>
+          </a:p>
+          <a:p>
+            <a:pPr lvl="2">
+              <a:buFont typeface="Arial" panose="020B0604020202020204" pitchFamily="34" charset="0"/>
+              <a:buChar char="•"/>
+            </a:pPr>
+            <a:r>
+              <a:rPr lang="en-US" dirty="0"/>
+              <a:t>Name </a:t>
+            </a:r>
+          </a:p>
+          <a:p>
+            <a:pPr lvl="2">
+              <a:buFont typeface="Arial" panose="020B0604020202020204" pitchFamily="34" charset="0"/>
+              <a:buChar char="•"/>
+            </a:pPr>
+            <a:r>
+              <a:rPr lang="en-US" dirty="0"/>
+              <a:t>Color </a:t>
+            </a:r>
+          </a:p>
+          <a:p>
+            <a:pPr lvl="2">
+              <a:buFont typeface="Arial" panose="020B0604020202020204" pitchFamily="34" charset="0"/>
+              <a:buChar char="•"/>
+            </a:pPr>
+            <a:r>
+              <a:rPr lang="en-US" dirty="0"/>
+              <a:t>Age </a:t>
+            </a:r>
+          </a:p>
+          <a:p>
+            <a:pPr lvl="1"/>
+            <a:r>
+              <a:rPr lang="en-US" dirty="0"/>
+              <a:t>✅ </a:t>
+            </a:r>
+            <a:r>
+              <a:rPr lang="en-US" b="1" dirty="0"/>
+              <a:t>Behaviors (Methods)</a:t>
+            </a:r>
+            <a:endParaRPr lang="en-US" dirty="0"/>
+          </a:p>
+          <a:p>
+            <a:pPr lvl="2">
+              <a:buFont typeface="Arial" panose="020B0604020202020204" pitchFamily="34" charset="0"/>
+              <a:buChar char="•"/>
+            </a:pPr>
+            <a:r>
+              <a:rPr lang="en-US" dirty="0"/>
+              <a:t>Walk </a:t>
+            </a:r>
+          </a:p>
+          <a:p>
+            <a:pPr lvl="2">
+              <a:buFont typeface="Arial" panose="020B0604020202020204" pitchFamily="34" charset="0"/>
+              <a:buChar char="•"/>
+            </a:pPr>
+            <a:r>
+              <a:rPr lang="en-US" dirty="0"/>
+              <a:t>Run </a:t>
+            </a:r>
+          </a:p>
+          <a:p>
+            <a:pPr lvl="2">
+              <a:buFont typeface="Arial" panose="020B0604020202020204" pitchFamily="34" charset="0"/>
+              <a:buChar char="•"/>
+            </a:pPr>
+            <a:r>
+              <a:rPr lang="en-US" dirty="0"/>
+              <a:t>Study </a:t>
+            </a:r>
+          </a:p>
+          <a:p>
+            <a:pPr lvl="2">
+              <a:buFont typeface="Arial" panose="020B0604020202020204" pitchFamily="34" charset="0"/>
+              <a:buChar char="•"/>
+            </a:pPr>
+            <a:r>
+              <a:rPr lang="en-US" dirty="0"/>
+              <a:t>Drive</a:t>
+            </a:r>
+          </a:p>
+        </p:txBody>
+      </p:sp>
     </p:spTree>
     <p:extLst>
       <p:ext uri="{BB962C8B-B14F-4D97-AF65-F5344CB8AC3E}">
-        <p14:creationId xmlns:p14="http://schemas.microsoft.com/office/powerpoint/2010/main" val="4069018019"/>
+        <p14:creationId xmlns:p14="http://schemas.microsoft.com/office/powerpoint/2010/main" val="4190047530"/>
       </p:ext>
     </p:extLst>
   </p:cSld>
@@ -4589,7 +4430,7 @@
           <p:cNvPr id="2" name="Image 1">
             <a:extLst>
               <a:ext uri="{FF2B5EF4-FFF2-40B4-BE49-F238E27FC236}">
-                <a16:creationId xmlns:a16="http://schemas.microsoft.com/office/drawing/2014/main" id="{209DFEFA-A27F-497F-A039-3F0B67EC4698}"/>
+                <a16:creationId xmlns:a16="http://schemas.microsoft.com/office/drawing/2014/main" id="{369B7BAB-193C-4C69-ABA4-0EB1CA0D0F5F}"/>
               </a:ext>
             </a:extLst>
           </p:cNvPr>
@@ -4606,8 +4447,8 @@
         </p:blipFill>
         <p:spPr>
           <a:xfrm>
-            <a:off x="1829696" y="1066250"/>
-            <a:ext cx="5484607" cy="2904570"/>
+            <a:off x="1228485" y="64113"/>
+            <a:ext cx="6687030" cy="5015273"/>
           </a:xfrm>
           <a:prstGeom prst="rect">
             <a:avLst/>
@@ -4617,7 +4458,7 @@
     </p:spTree>
     <p:extLst>
       <p:ext uri="{BB962C8B-B14F-4D97-AF65-F5344CB8AC3E}">
-        <p14:creationId xmlns:p14="http://schemas.microsoft.com/office/powerpoint/2010/main" val="4242187192"/>
+        <p14:creationId xmlns:p14="http://schemas.microsoft.com/office/powerpoint/2010/main" val="2039042749"/>
       </p:ext>
     </p:extLst>
   </p:cSld>
@@ -4644,69 +4485,125 @@
           <a:chExt cx="0" cy="0"/>
         </a:xfrm>
       </p:grpSpPr>
-      <p:pic>
-        <p:nvPicPr>
-          <p:cNvPr id="2" name="Image 1">
-            <a:extLst>
-              <a:ext uri="{FF2B5EF4-FFF2-40B4-BE49-F238E27FC236}">
-                <a16:creationId xmlns:a16="http://schemas.microsoft.com/office/drawing/2014/main" id="{0C94C63F-300A-495E-BF70-B05A2BC9FB0D}"/>
-              </a:ext>
-            </a:extLst>
-          </p:cNvPr>
-          <p:cNvPicPr>
-            <a:picLocks noChangeAspect="1"/>
-          </p:cNvPicPr>
+      <p:sp>
+        <p:nvSpPr>
+          <p:cNvPr id="3" name="Rectangle 2">
+            <a:extLst>
+              <a:ext uri="{FF2B5EF4-FFF2-40B4-BE49-F238E27FC236}">
+                <a16:creationId xmlns:a16="http://schemas.microsoft.com/office/drawing/2014/main" id="{A10C7B18-AF1A-4817-B6C6-DF02A14BE351}"/>
+              </a:ext>
+            </a:extLst>
+          </p:cNvPr>
+          <p:cNvSpPr/>
           <p:nvPr/>
-        </p:nvPicPr>
-        <p:blipFill>
-          <a:blip r:embed="rId2"/>
-          <a:stretch>
-            <a:fillRect/>
-          </a:stretch>
-        </p:blipFill>
+        </p:nvSpPr>
         <p:spPr>
           <a:xfrm>
-            <a:off x="1534937" y="35756"/>
-            <a:ext cx="5355745" cy="2470515"/>
+            <a:off x="715412" y="320128"/>
+            <a:ext cx="833883" cy="400110"/>
           </a:xfrm>
           <a:prstGeom prst="rect">
             <a:avLst/>
           </a:prstGeom>
         </p:spPr>
-      </p:pic>
-      <p:pic>
-        <p:nvPicPr>
-          <p:cNvPr id="3" name="Image 2">
-            <a:extLst>
-              <a:ext uri="{FF2B5EF4-FFF2-40B4-BE49-F238E27FC236}">
-                <a16:creationId xmlns:a16="http://schemas.microsoft.com/office/drawing/2014/main" id="{D72A1556-3E09-4FC0-9D7A-837CB0050CFA}"/>
-              </a:ext>
-            </a:extLst>
-          </p:cNvPr>
-          <p:cNvPicPr>
-            <a:picLocks noChangeAspect="1"/>
-          </p:cNvPicPr>
+        <p:txBody>
+          <a:bodyPr wrap="none">
+            <a:spAutoFit/>
+          </a:bodyPr>
+          <a:lstStyle/>
+          <a:p>
+            <a:r>
+              <a:rPr lang="en-US" sz="2000" b="1" dirty="0"/>
+              <a:t>Class?</a:t>
+            </a:r>
+          </a:p>
+        </p:txBody>
+      </p:sp>
+      <p:sp>
+        <p:nvSpPr>
+          <p:cNvPr id="4" name="Rectangle 3">
+            <a:extLst>
+              <a:ext uri="{FF2B5EF4-FFF2-40B4-BE49-F238E27FC236}">
+                <a16:creationId xmlns:a16="http://schemas.microsoft.com/office/drawing/2014/main" id="{1ED8E295-7178-41E3-B9E3-DBCDF1984EAF}"/>
+              </a:ext>
+            </a:extLst>
+          </p:cNvPr>
+          <p:cNvSpPr/>
           <p:nvPr/>
-        </p:nvPicPr>
-        <p:blipFill rotWithShape="1">
-          <a:blip r:embed="rId3"/>
-          <a:srcRect t="16367" r="1439"/>
-          <a:stretch/>
-        </p:blipFill>
+        </p:nvSpPr>
         <p:spPr>
           <a:xfrm>
-            <a:off x="1534937" y="2637229"/>
-            <a:ext cx="5355745" cy="2267052"/>
+            <a:off x="1190061" y="819940"/>
+            <a:ext cx="4268348" cy="369332"/>
           </a:xfrm>
           <a:prstGeom prst="rect">
             <a:avLst/>
           </a:prstGeom>
         </p:spPr>
+        <p:txBody>
+          <a:bodyPr wrap="none">
+            <a:spAutoFit/>
+          </a:bodyPr>
+          <a:lstStyle/>
+          <a:p>
+            <a:r>
+              <a:rPr lang="en-US" dirty="0"/>
+              <a:t>A class is a blueprint used to create objects.</a:t>
+            </a:r>
+          </a:p>
+        </p:txBody>
+      </p:sp>
+      <p:pic>
+        <p:nvPicPr>
+          <p:cNvPr id="3074" name="Picture 2" descr="Week 2 -Object Oriented Programming (OOP) 1">
+            <a:extLst>
+              <a:ext uri="{FF2B5EF4-FFF2-40B4-BE49-F238E27FC236}">
+                <a16:creationId xmlns:a16="http://schemas.microsoft.com/office/drawing/2014/main" id="{77E80E89-7C9B-455F-B877-444D0F8440BC}"/>
+              </a:ext>
+            </a:extLst>
+          </p:cNvPr>
+          <p:cNvPicPr>
+            <a:picLocks noChangeAspect="1" noChangeArrowheads="1"/>
+          </p:cNvPicPr>
+          <p:nvPr/>
+        </p:nvPicPr>
+        <p:blipFill>
+          <a:blip r:embed="rId2">
+            <a:extLst>
+              <a:ext uri="{28A0092B-C50C-407E-A947-70E740481C1C}">
+                <a14:useLocalDpi xmlns:a14="http://schemas.microsoft.com/office/drawing/2010/main" val="0"/>
+              </a:ext>
+            </a:extLst>
+          </a:blip>
+          <a:srcRect/>
+          <a:stretch>
+            <a:fillRect/>
+          </a:stretch>
+        </p:blipFill>
+        <p:spPr bwMode="auto">
+          <a:xfrm>
+            <a:off x="1413677" y="1455322"/>
+            <a:ext cx="5976457" cy="3135593"/>
+          </a:xfrm>
+          <a:prstGeom prst="rect">
+            <a:avLst/>
+          </a:prstGeom>
+          <a:noFill/>
+          <a:extLst>
+            <a:ext uri="{909E8E84-426E-40DD-AFC4-6F175D3DCCD1}">
+              <a14:hiddenFill xmlns:a14="http://schemas.microsoft.com/office/drawing/2010/main">
+                <a:solidFill>
+                  <a:srgbClr val="FFFFFF"/>
+                </a:solidFill>
+              </a14:hiddenFill>
+            </a:ext>
+          </a:extLst>
+        </p:spPr>
       </p:pic>
     </p:spTree>
     <p:extLst>
       <p:ext uri="{BB962C8B-B14F-4D97-AF65-F5344CB8AC3E}">
-        <p14:creationId xmlns:p14="http://schemas.microsoft.com/office/powerpoint/2010/main" val="425003759"/>
+        <p14:creationId xmlns:p14="http://schemas.microsoft.com/office/powerpoint/2010/main" val="921152709"/>
       </p:ext>
     </p:extLst>
   </p:cSld>
@@ -4738,169 +4635,7 @@
           <p:cNvPr id="2" name="Rectangle 1">
             <a:extLst>
               <a:ext uri="{FF2B5EF4-FFF2-40B4-BE49-F238E27FC236}">
-                <a16:creationId xmlns:a16="http://schemas.microsoft.com/office/drawing/2014/main" id="{8C7B065B-047E-4AFC-AC15-932603757556}"/>
-              </a:ext>
-            </a:extLst>
-          </p:cNvPr>
-          <p:cNvSpPr/>
-          <p:nvPr/>
-        </p:nvSpPr>
-        <p:spPr>
-          <a:xfrm>
-            <a:off x="452147" y="455149"/>
-            <a:ext cx="6029483" cy="400110"/>
-          </a:xfrm>
-          <a:prstGeom prst="rect">
-            <a:avLst/>
-          </a:prstGeom>
-        </p:spPr>
-        <p:txBody>
-          <a:bodyPr wrap="square">
-            <a:spAutoFit/>
-          </a:bodyPr>
-          <a:lstStyle/>
-          <a:p>
-            <a:r>
-              <a:rPr lang="en-US" sz="2000" dirty="0">
-                <a:effectLst>
-                  <a:outerShdw blurRad="38100" dist="38100" dir="2700000" algn="tl">
-                    <a:srgbClr val="000000">
-                      <a:alpha val="43137"/>
-                    </a:srgbClr>
-                  </a:outerShdw>
-                </a:effectLst>
-              </a:rPr>
-              <a:t>1. What is Object-Oriented Programming (OOP)?</a:t>
-            </a:r>
-          </a:p>
-        </p:txBody>
-      </p:sp>
-      <p:sp>
-        <p:nvSpPr>
-          <p:cNvPr id="3" name="Rectangle 2">
-            <a:extLst>
-              <a:ext uri="{FF2B5EF4-FFF2-40B4-BE49-F238E27FC236}">
-                <a16:creationId xmlns:a16="http://schemas.microsoft.com/office/drawing/2014/main" id="{082A62C1-DCF1-46F4-BB8F-316D87C93A14}"/>
-              </a:ext>
-            </a:extLst>
-          </p:cNvPr>
-          <p:cNvSpPr/>
-          <p:nvPr/>
-        </p:nvSpPr>
-        <p:spPr>
-          <a:xfrm>
-            <a:off x="1048276" y="1030303"/>
-            <a:ext cx="6858000" cy="2031325"/>
-          </a:xfrm>
-          <a:prstGeom prst="rect">
-            <a:avLst/>
-          </a:prstGeom>
-        </p:spPr>
-        <p:txBody>
-          <a:bodyPr wrap="square">
-            <a:spAutoFit/>
-          </a:bodyPr>
-          <a:lstStyle/>
-          <a:p>
-            <a:r>
-              <a:rPr lang="en-US" dirty="0"/>
-              <a:t>Object-Oriented Programming (OOP) is a programming </a:t>
-            </a:r>
-            <a:r>
-              <a:rPr lang="en-US" b="1" dirty="0"/>
-              <a:t>paradigm</a:t>
-            </a:r>
-            <a:r>
-              <a:rPr lang="en-US" dirty="0"/>
-              <a:t> that organizes software around </a:t>
-            </a:r>
-            <a:r>
-              <a:rPr lang="en-US" b="1" dirty="0"/>
-              <a:t>objects</a:t>
-            </a:r>
-            <a:r>
-              <a:rPr lang="en-US" dirty="0"/>
-              <a:t> rather than functions.</a:t>
-            </a:r>
-          </a:p>
-          <a:p>
-            <a:r>
-              <a:rPr lang="en-US" dirty="0"/>
-              <a:t>An object represents a real-world entity that contains:</a:t>
-            </a:r>
-          </a:p>
-          <a:p>
-            <a:pPr>
-              <a:buFont typeface="Arial" panose="020B0604020202020204" pitchFamily="34" charset="0"/>
-              <a:buChar char="•"/>
-            </a:pPr>
-            <a:r>
-              <a:rPr lang="en-US" b="1" dirty="0"/>
-              <a:t>Data (Attributes)</a:t>
-            </a:r>
-            <a:r>
-              <a:rPr lang="en-US" dirty="0"/>
-              <a:t> → Information about the object. </a:t>
-            </a:r>
-          </a:p>
-          <a:p>
-            <a:pPr>
-              <a:buFont typeface="Arial" panose="020B0604020202020204" pitchFamily="34" charset="0"/>
-              <a:buChar char="•"/>
-            </a:pPr>
-            <a:r>
-              <a:rPr lang="en-US" b="1" dirty="0"/>
-              <a:t>Behavior (Methods)</a:t>
-            </a:r>
-            <a:r>
-              <a:rPr lang="en-US" dirty="0"/>
-              <a:t> → Actions the object can perform. </a:t>
-            </a:r>
-          </a:p>
-          <a:p>
-            <a:r>
-              <a:rPr lang="en-US" dirty="0"/>
-              <a:t>Instead of writing a program as a sequence of functions, OOP models the program as a collection of interacting objects.</a:t>
-            </a:r>
-          </a:p>
-        </p:txBody>
-      </p:sp>
-    </p:spTree>
-    <p:extLst>
-      <p:ext uri="{BB962C8B-B14F-4D97-AF65-F5344CB8AC3E}">
-        <p14:creationId xmlns:p14="http://schemas.microsoft.com/office/powerpoint/2010/main" val="3999617203"/>
-      </p:ext>
-    </p:extLst>
-  </p:cSld>
-  <p:clrMapOvr>
-    <a:masterClrMapping/>
-  </p:clrMapOvr>
-</p:sld>
-</file>
-
-<file path=ppt/slides/slide7.xml><?xml version="1.0" encoding="utf-8"?>
-<p:sld xmlns:a="http://schemas.openxmlformats.org/drawingml/2006/main" xmlns:r="http://schemas.openxmlformats.org/officeDocument/2006/relationships" xmlns:p="http://schemas.openxmlformats.org/presentationml/2006/main">
-  <p:cSld>
-    <p:spTree>
-      <p:nvGrpSpPr>
-        <p:cNvPr id="1" name=""/>
-        <p:cNvGrpSpPr/>
-        <p:nvPr/>
-      </p:nvGrpSpPr>
-      <p:grpSpPr>
-        <a:xfrm>
-          <a:off x="0" y="0"/>
-          <a:ext cx="0" cy="0"/>
-          <a:chOff x="0" y="0"/>
-          <a:chExt cx="0" cy="0"/>
-        </a:xfrm>
-      </p:grpSpPr>
-      <p:sp>
-        <p:nvSpPr>
-          <p:cNvPr id="3" name="Rectangle 2">
-            <a:extLst>
-              <a:ext uri="{FF2B5EF4-FFF2-40B4-BE49-F238E27FC236}">
-                <a16:creationId xmlns:a16="http://schemas.microsoft.com/office/drawing/2014/main" id="{0DF50BCD-7141-4062-BDCF-F92A6A469DD8}"/>
+                <a16:creationId xmlns:a16="http://schemas.microsoft.com/office/drawing/2014/main" id="{EE1FA76F-F1C4-490A-AEB9-C2747B03BBF8}"/>
               </a:ext>
             </a:extLst>
           </p:cNvPr>
@@ -4911,8 +4646,8 @@
         </p:nvSpPr>
         <p:spPr bwMode="auto">
           <a:xfrm>
-            <a:off x="373843" y="476183"/>
-            <a:ext cx="8176918" cy="4093428"/>
+            <a:off x="248855" y="298974"/>
+            <a:ext cx="1992853" cy="646331"/>
           </a:xfrm>
           <a:prstGeom prst="rect">
             <a:avLst/>
@@ -4987,7 +4722,7 @@
                 <a:effectLst/>
                 <a:latin typeface="Arial" panose="020B0604020202020204" pitchFamily="34" charset="0"/>
               </a:rPr>
-              <a:t>2. Why OOP?</a:t>
+              <a:t>Creating a Class</a:t>
             </a:r>
           </a:p>
           <a:p>
@@ -5007,171 +4742,153 @@
               <a:buNone/>
               <a:tabLst/>
             </a:pPr>
-            <a:r>
-              <a:rPr kumimoji="0" lang="en-US" altLang="en-US" sz="1400" b="0" i="0" u="none" strike="noStrike" cap="none" normalizeH="0" baseline="0" dirty="0">
-                <a:ln>
-                  <a:noFill/>
-                </a:ln>
+            <a:endParaRPr kumimoji="0" lang="en-US" altLang="en-US" b="0" i="0" u="none" strike="noStrike" cap="none" normalizeH="0" baseline="0" dirty="0">
+              <a:ln>
+                <a:noFill/>
+              </a:ln>
+              <a:solidFill>
+                <a:schemeClr val="tx1"/>
+              </a:solidFill>
+              <a:effectLst/>
+              <a:latin typeface="Arial" panose="020B0604020202020204" pitchFamily="34" charset="0"/>
+            </a:endParaRPr>
+          </a:p>
+        </p:txBody>
+      </p:sp>
+      <p:pic>
+        <p:nvPicPr>
+          <p:cNvPr id="6" name="Image 5">
+            <a:extLst>
+              <a:ext uri="{FF2B5EF4-FFF2-40B4-BE49-F238E27FC236}">
+                <a16:creationId xmlns:a16="http://schemas.microsoft.com/office/drawing/2014/main" id="{1467D343-2DD1-4916-8AA0-467879775D8B}"/>
+              </a:ext>
+            </a:extLst>
+          </p:cNvPr>
+          <p:cNvPicPr>
+            <a:picLocks noChangeAspect="1"/>
+          </p:cNvPicPr>
+          <p:nvPr/>
+        </p:nvPicPr>
+        <p:blipFill>
+          <a:blip r:embed="rId2"/>
+          <a:stretch>
+            <a:fillRect/>
+          </a:stretch>
+        </p:blipFill>
+        <p:spPr>
+          <a:xfrm>
+            <a:off x="1188762" y="711690"/>
+            <a:ext cx="6051203" cy="3938084"/>
+          </a:xfrm>
+          <a:prstGeom prst="rect">
+            <a:avLst/>
+          </a:prstGeom>
+          <a:ln>
+            <a:noFill/>
+          </a:ln>
+          <a:effectLst>
+            <a:outerShdw blurRad="292100" dist="139700" dir="2700000" algn="tl" rotWithShape="0">
+              <a:srgbClr val="333333">
+                <a:alpha val="65000"/>
+              </a:srgbClr>
+            </a:outerShdw>
+          </a:effectLst>
+        </p:spPr>
+      </p:pic>
+    </p:spTree>
+    <p:extLst>
+      <p:ext uri="{BB962C8B-B14F-4D97-AF65-F5344CB8AC3E}">
+        <p14:creationId xmlns:p14="http://schemas.microsoft.com/office/powerpoint/2010/main" val="363605466"/>
+      </p:ext>
+    </p:extLst>
+  </p:cSld>
+  <p:clrMapOvr>
+    <a:masterClrMapping/>
+  </p:clrMapOvr>
+</p:sld>
+</file>
+
+<file path=ppt/slides/slide7.xml><?xml version="1.0" encoding="utf-8"?>
+<p:sld xmlns:a="http://schemas.openxmlformats.org/drawingml/2006/main" xmlns:r="http://schemas.openxmlformats.org/officeDocument/2006/relationships" xmlns:p="http://schemas.openxmlformats.org/presentationml/2006/main">
+  <p:cSld>
+    <p:spTree>
+      <p:nvGrpSpPr>
+        <p:cNvPr id="1" name=""/>
+        <p:cNvGrpSpPr/>
+        <p:nvPr/>
+      </p:nvGrpSpPr>
+      <p:grpSpPr>
+        <a:xfrm>
+          <a:off x="0" y="0"/>
+          <a:ext cx="0" cy="0"/>
+          <a:chOff x="0" y="0"/>
+          <a:chExt cx="0" cy="0"/>
+        </a:xfrm>
+      </p:grpSpPr>
+      <p:sp>
+        <p:nvSpPr>
+          <p:cNvPr id="2" name="Rectangle 1">
+            <a:extLst>
+              <a:ext uri="{FF2B5EF4-FFF2-40B4-BE49-F238E27FC236}">
+                <a16:creationId xmlns:a16="http://schemas.microsoft.com/office/drawing/2014/main" id="{713A5E07-C5CE-4BDD-81DC-528FB3F1515D}"/>
+              </a:ext>
+            </a:extLst>
+          </p:cNvPr>
+          <p:cNvSpPr>
+            <a:spLocks noChangeArrowheads="1"/>
+          </p:cNvSpPr>
+          <p:nvPr/>
+        </p:nvSpPr>
+        <p:spPr bwMode="auto">
+          <a:xfrm>
+            <a:off x="630819" y="664560"/>
+            <a:ext cx="2633241" cy="641933"/>
+          </a:xfrm>
+          <a:prstGeom prst="rect">
+            <a:avLst/>
+          </a:prstGeom>
+          <a:noFill/>
+          <a:ln>
+            <a:noFill/>
+          </a:ln>
+          <a:effectLst/>
+          <a:extLst>
+            <a:ext uri="{909E8E84-426E-40DD-AFC4-6F175D3DCCD1}">
+              <a14:hiddenFill xmlns:a14="http://schemas.microsoft.com/office/drawing/2010/main">
+                <a:solidFill>
+                  <a:schemeClr val="accent1"/>
+                </a:solidFill>
+              </a14:hiddenFill>
+            </a:ext>
+            <a:ext uri="{91240B29-F687-4F45-9708-019B960494DF}">
+              <a14:hiddenLine xmlns:a14="http://schemas.microsoft.com/office/drawing/2010/main" w="9525">
                 <a:solidFill>
                   <a:schemeClr val="tx1"/>
                 </a:solidFill>
-                <a:effectLst/>
-                <a:latin typeface="Arial" panose="020B0604020202020204" pitchFamily="34" charset="0"/>
-              </a:rPr>
-              <a:t>As programs become larger, procedural programming becomes difficult to </a:t>
-            </a:r>
-            <a:r>
-              <a:rPr kumimoji="0" lang="en-US" altLang="en-US" sz="1400" b="0" i="0" u="none" strike="noStrike" cap="none" normalizeH="0" baseline="0" dirty="0" err="1">
-                <a:ln>
-                  <a:noFill/>
-                </a:ln>
-                <a:solidFill>
-                  <a:schemeClr val="tx1"/>
-                </a:solidFill>
-                <a:effectLst/>
-                <a:latin typeface="Arial" panose="020B0604020202020204" pitchFamily="34" charset="0"/>
-              </a:rPr>
-              <a:t>manage.Problems</a:t>
-            </a:r>
-            <a:r>
-              <a:rPr kumimoji="0" lang="en-US" altLang="en-US" sz="1400" b="0" i="0" u="none" strike="noStrike" cap="none" normalizeH="0" baseline="0" dirty="0">
-                <a:ln>
-                  <a:noFill/>
-                </a:ln>
-                <a:solidFill>
-                  <a:schemeClr val="tx1"/>
-                </a:solidFill>
-                <a:effectLst/>
-                <a:latin typeface="Arial" panose="020B0604020202020204" pitchFamily="34" charset="0"/>
-              </a:rPr>
-              <a:t> include:</a:t>
-            </a:r>
-          </a:p>
-          <a:p>
-            <a:pPr lvl="1" eaLnBrk="0" fontAlgn="base" hangingPunct="0">
-              <a:spcBef>
-                <a:spcPct val="0"/>
-              </a:spcBef>
-              <a:spcAft>
-                <a:spcPct val="0"/>
-              </a:spcAft>
-              <a:buFontTx/>
-              <a:buChar char="•"/>
-            </a:pPr>
-            <a:r>
-              <a:rPr kumimoji="0" lang="en-US" altLang="en-US" sz="1400" b="0" i="0" u="none" strike="noStrike" cap="none" normalizeH="0" baseline="0" dirty="0">
-                <a:ln>
-                  <a:noFill/>
-                </a:ln>
-                <a:solidFill>
-                  <a:schemeClr val="tx1"/>
-                </a:solidFill>
-                <a:effectLst/>
-                <a:latin typeface="Arial" panose="020B0604020202020204" pitchFamily="34" charset="0"/>
-              </a:rPr>
-              <a:t>Repeated code </a:t>
-            </a:r>
-          </a:p>
-          <a:p>
-            <a:pPr lvl="1" eaLnBrk="0" fontAlgn="base" hangingPunct="0">
-              <a:spcBef>
-                <a:spcPct val="0"/>
-              </a:spcBef>
-              <a:spcAft>
-                <a:spcPct val="0"/>
-              </a:spcAft>
-              <a:buFontTx/>
-              <a:buChar char="•"/>
-            </a:pPr>
-            <a:r>
-              <a:rPr kumimoji="0" lang="en-US" altLang="en-US" sz="1400" b="0" i="0" u="none" strike="noStrike" cap="none" normalizeH="0" baseline="0" dirty="0">
-                <a:ln>
-                  <a:noFill/>
-                </a:ln>
-                <a:solidFill>
-                  <a:schemeClr val="tx1"/>
-                </a:solidFill>
-                <a:effectLst/>
-                <a:latin typeface="Arial" panose="020B0604020202020204" pitchFamily="34" charset="0"/>
-              </a:rPr>
-              <a:t>Difficult maintenance </a:t>
-            </a:r>
-          </a:p>
-          <a:p>
-            <a:pPr lvl="1" eaLnBrk="0" fontAlgn="base" hangingPunct="0">
-              <a:spcBef>
-                <a:spcPct val="0"/>
-              </a:spcBef>
-              <a:spcAft>
-                <a:spcPct val="0"/>
-              </a:spcAft>
-              <a:buFontTx/>
-              <a:buChar char="•"/>
-            </a:pPr>
-            <a:r>
-              <a:rPr kumimoji="0" lang="en-US" altLang="en-US" sz="1400" b="0" i="0" u="none" strike="noStrike" cap="none" normalizeH="0" baseline="0" dirty="0">
-                <a:ln>
-                  <a:noFill/>
-                </a:ln>
-                <a:solidFill>
-                  <a:schemeClr val="tx1"/>
-                </a:solidFill>
-                <a:effectLst/>
-                <a:latin typeface="Arial" panose="020B0604020202020204" pitchFamily="34" charset="0"/>
-              </a:rPr>
-              <a:t>Difficult debugging </a:t>
-            </a:r>
-          </a:p>
-          <a:p>
-            <a:pPr lvl="1" eaLnBrk="0" fontAlgn="base" hangingPunct="0">
-              <a:spcBef>
-                <a:spcPct val="0"/>
-              </a:spcBef>
-              <a:spcAft>
-                <a:spcPct val="0"/>
-              </a:spcAft>
-              <a:buFontTx/>
-              <a:buChar char="•"/>
-            </a:pPr>
-            <a:r>
-              <a:rPr kumimoji="0" lang="en-US" altLang="en-US" sz="1400" b="0" i="0" u="none" strike="noStrike" cap="none" normalizeH="0" baseline="0" dirty="0">
-                <a:ln>
-                  <a:noFill/>
-                </a:ln>
-                <a:solidFill>
-                  <a:schemeClr val="tx1"/>
-                </a:solidFill>
-                <a:effectLst/>
-                <a:latin typeface="Arial" panose="020B0604020202020204" pitchFamily="34" charset="0"/>
-              </a:rPr>
-              <a:t>Poor organization </a:t>
-            </a:r>
-          </a:p>
-          <a:p>
-            <a:pPr lvl="1" eaLnBrk="0" fontAlgn="base" hangingPunct="0">
-              <a:spcBef>
-                <a:spcPct val="0"/>
-              </a:spcBef>
-              <a:spcAft>
-                <a:spcPct val="0"/>
-              </a:spcAft>
-              <a:buFontTx/>
-              <a:buChar char="•"/>
-            </a:pPr>
-            <a:r>
-              <a:rPr kumimoji="0" lang="en-US" altLang="en-US" sz="1400" b="0" i="0" u="none" strike="noStrike" cap="none" normalizeH="0" baseline="0" dirty="0">
-                <a:ln>
-                  <a:noFill/>
-                </a:ln>
-                <a:solidFill>
-                  <a:schemeClr val="tx1"/>
-                </a:solidFill>
-                <a:effectLst/>
-                <a:latin typeface="Arial" panose="020B0604020202020204" pitchFamily="34" charset="0"/>
-              </a:rPr>
-              <a:t>Low code reusability </a:t>
-            </a:r>
-          </a:p>
+                <a:miter lim="800000"/>
+                <a:headEnd/>
+                <a:tailEnd/>
+              </a14:hiddenLine>
+            </a:ext>
+            <a:ext uri="{AF507438-7753-43E0-B8FC-AC1667EBCBE1}">
+              <a14:hiddenEffects xmlns:a14="http://schemas.microsoft.com/office/drawing/2010/main">
+                <a:effectLst>
+                  <a:outerShdw dist="35921" dir="2700000" algn="ctr" rotWithShape="0">
+                    <a:schemeClr val="bg2"/>
+                  </a:outerShdw>
+                </a:effectLst>
+              </a14:hiddenEffects>
+            </a:ext>
+          </a:extLst>
+        </p:spPr>
+        <p:txBody>
+          <a:bodyPr vert="horz" wrap="square" lIns="91440" tIns="45720" rIns="91440" bIns="45720" numCol="1" anchor="ctr" anchorCtr="0" compatLnSpc="1">
+            <a:prstTxWarp prst="textNoShape">
+              <a:avLst/>
+            </a:prstTxWarp>
+            <a:spAutoFit/>
+          </a:bodyPr>
+          <a:lstStyle/>
           <a:p>
             <a:pPr marL="0" marR="0" lvl="0" indent="0" algn="l" defTabSz="914400" rtl="0" eaLnBrk="0" fontAlgn="base" latinLnBrk="0" hangingPunct="0">
               <a:lnSpc>
@@ -5189,35 +4906,19 @@
               <a:buNone/>
               <a:tabLst/>
             </a:pPr>
-            <a:endParaRPr kumimoji="0" lang="en-US" altLang="en-US" sz="1400" b="1" i="0" u="none" strike="noStrike" cap="none" normalizeH="0" baseline="0" dirty="0">
-              <a:ln>
-                <a:noFill/>
-              </a:ln>
-              <a:solidFill>
-                <a:schemeClr val="tx1"/>
-              </a:solidFill>
-              <a:effectLst/>
-              <a:latin typeface="Arial" panose="020B0604020202020204" pitchFamily="34" charset="0"/>
-            </a:endParaRPr>
-          </a:p>
-          <a:p>
-            <a:pPr eaLnBrk="0" fontAlgn="base" hangingPunct="0">
-              <a:spcBef>
-                <a:spcPct val="0"/>
-              </a:spcBef>
-              <a:spcAft>
-                <a:spcPct val="0"/>
-              </a:spcAft>
-            </a:pPr>
-            <a:r>
-              <a:rPr lang="en-US" altLang="en-US" sz="1400" dirty="0">
+            <a:r>
+              <a:rPr kumimoji="0" lang="en-US" altLang="en-US" b="1" i="0" u="none" strike="noStrike" cap="none" normalizeH="0" baseline="0" dirty="0">
+                <a:ln>
+                  <a:noFill/>
+                </a:ln>
+                <a:solidFill>
+                  <a:schemeClr val="tx1"/>
+                </a:solidFill>
+                <a:effectLst/>
                 <a:latin typeface="Arial" panose="020B0604020202020204" pitchFamily="34" charset="0"/>
               </a:rPr>
-              <a:t>OOP solves these problems by organizing code into reusable objects.</a:t>
-            </a:r>
-            <a:endParaRPr lang="en-US" altLang="en-US" sz="1400" b="1" dirty="0">
-              <a:latin typeface="Arial" panose="020B0604020202020204" pitchFamily="34" charset="0"/>
-            </a:endParaRPr>
+              <a:t>Creating an Object</a:t>
+            </a:r>
           </a:p>
           <a:p>
             <a:pPr marL="0" marR="0" lvl="0" indent="0" algn="l" defTabSz="914400" rtl="0" eaLnBrk="0" fontAlgn="base" latinLnBrk="0" hangingPunct="0">
@@ -5236,215 +4937,6 @@
               <a:buNone/>
               <a:tabLst/>
             </a:pPr>
-            <a:endParaRPr kumimoji="0" lang="en-US" altLang="en-US" sz="1400" b="1" i="0" u="none" strike="noStrike" cap="none" normalizeH="0" baseline="0" dirty="0">
-              <a:ln>
-                <a:noFill/>
-              </a:ln>
-              <a:solidFill>
-                <a:schemeClr val="tx1"/>
-              </a:solidFill>
-              <a:effectLst/>
-              <a:latin typeface="Arial" panose="020B0604020202020204" pitchFamily="34" charset="0"/>
-            </a:endParaRPr>
-          </a:p>
-          <a:p>
-            <a:pPr marL="0" marR="0" lvl="0" indent="0" algn="l" defTabSz="914400" rtl="0" eaLnBrk="0" fontAlgn="base" latinLnBrk="0" hangingPunct="0">
-              <a:lnSpc>
-                <a:spcPct val="100000"/>
-              </a:lnSpc>
-              <a:spcBef>
-                <a:spcPct val="0"/>
-              </a:spcBef>
-              <a:spcAft>
-                <a:spcPct val="0"/>
-              </a:spcAft>
-              <a:buClrTx/>
-              <a:buSzTx/>
-              <a:buFontTx/>
-              <a:buNone/>
-              <a:tabLst/>
-            </a:pPr>
-            <a:r>
-              <a:rPr kumimoji="0" lang="en-US" altLang="en-US" sz="1400" b="1" i="0" u="none" strike="noStrike" cap="none" normalizeH="0" baseline="0" dirty="0">
-                <a:ln>
-                  <a:noFill/>
-                </a:ln>
-                <a:solidFill>
-                  <a:schemeClr val="tx1"/>
-                </a:solidFill>
-                <a:effectLst/>
-                <a:latin typeface="Arial" panose="020B0604020202020204" pitchFamily="34" charset="0"/>
-              </a:rPr>
-              <a:t>Benefits</a:t>
-            </a:r>
-          </a:p>
-          <a:p>
-            <a:pPr lvl="1" eaLnBrk="0" fontAlgn="base" hangingPunct="0">
-              <a:spcBef>
-                <a:spcPct val="0"/>
-              </a:spcBef>
-              <a:spcAft>
-                <a:spcPct val="0"/>
-              </a:spcAft>
-              <a:buFontTx/>
-              <a:buChar char="•"/>
-            </a:pPr>
-            <a:r>
-              <a:rPr kumimoji="0" lang="en-US" altLang="en-US" sz="1400" b="0" i="0" u="none" strike="noStrike" cap="none" normalizeH="0" baseline="0" dirty="0">
-                <a:ln>
-                  <a:noFill/>
-                </a:ln>
-                <a:solidFill>
-                  <a:schemeClr val="tx1"/>
-                </a:solidFill>
-                <a:effectLst/>
-                <a:latin typeface="Arial" panose="020B0604020202020204" pitchFamily="34" charset="0"/>
-              </a:rPr>
-              <a:t>Better organization </a:t>
-            </a:r>
-          </a:p>
-          <a:p>
-            <a:pPr lvl="1" eaLnBrk="0" fontAlgn="base" hangingPunct="0">
-              <a:spcBef>
-                <a:spcPct val="0"/>
-              </a:spcBef>
-              <a:spcAft>
-                <a:spcPct val="0"/>
-              </a:spcAft>
-              <a:buFontTx/>
-              <a:buChar char="•"/>
-            </a:pPr>
-            <a:r>
-              <a:rPr kumimoji="0" lang="en-US" altLang="en-US" sz="1400" b="0" i="0" u="none" strike="noStrike" cap="none" normalizeH="0" baseline="0" dirty="0">
-                <a:ln>
-                  <a:noFill/>
-                </a:ln>
-                <a:solidFill>
-                  <a:schemeClr val="tx1"/>
-                </a:solidFill>
-                <a:effectLst/>
-                <a:latin typeface="Arial" panose="020B0604020202020204" pitchFamily="34" charset="0"/>
-              </a:rPr>
-              <a:t>Easier maintenance </a:t>
-            </a:r>
-          </a:p>
-          <a:p>
-            <a:pPr lvl="1" eaLnBrk="0" fontAlgn="base" hangingPunct="0">
-              <a:spcBef>
-                <a:spcPct val="0"/>
-              </a:spcBef>
-              <a:spcAft>
-                <a:spcPct val="0"/>
-              </a:spcAft>
-              <a:buFontTx/>
-              <a:buChar char="•"/>
-            </a:pPr>
-            <a:r>
-              <a:rPr kumimoji="0" lang="en-US" altLang="en-US" sz="1400" b="0" i="0" u="none" strike="noStrike" cap="none" normalizeH="0" baseline="0" dirty="0">
-                <a:ln>
-                  <a:noFill/>
-                </a:ln>
-                <a:solidFill>
-                  <a:schemeClr val="tx1"/>
-                </a:solidFill>
-                <a:effectLst/>
-                <a:latin typeface="Arial" panose="020B0604020202020204" pitchFamily="34" charset="0"/>
-              </a:rPr>
-              <a:t>Code reuse </a:t>
-            </a:r>
-          </a:p>
-          <a:p>
-            <a:pPr lvl="1" eaLnBrk="0" fontAlgn="base" hangingPunct="0">
-              <a:spcBef>
-                <a:spcPct val="0"/>
-              </a:spcBef>
-              <a:spcAft>
-                <a:spcPct val="0"/>
-              </a:spcAft>
-              <a:buFontTx/>
-              <a:buChar char="•"/>
-            </a:pPr>
-            <a:r>
-              <a:rPr kumimoji="0" lang="en-US" altLang="en-US" sz="1400" b="0" i="0" u="none" strike="noStrike" cap="none" normalizeH="0" baseline="0" dirty="0">
-                <a:ln>
-                  <a:noFill/>
-                </a:ln>
-                <a:solidFill>
-                  <a:schemeClr val="tx1"/>
-                </a:solidFill>
-                <a:effectLst/>
-                <a:latin typeface="Arial" panose="020B0604020202020204" pitchFamily="34" charset="0"/>
-              </a:rPr>
-              <a:t>Easier teamwork </a:t>
-            </a:r>
-          </a:p>
-          <a:p>
-            <a:pPr lvl="1" eaLnBrk="0" fontAlgn="base" hangingPunct="0">
-              <a:spcBef>
-                <a:spcPct val="0"/>
-              </a:spcBef>
-              <a:spcAft>
-                <a:spcPct val="0"/>
-              </a:spcAft>
-              <a:buFontTx/>
-              <a:buChar char="•"/>
-            </a:pPr>
-            <a:r>
-              <a:rPr kumimoji="0" lang="en-US" altLang="en-US" sz="1400" b="0" i="0" u="none" strike="noStrike" cap="none" normalizeH="0" baseline="0" dirty="0">
-                <a:ln>
-                  <a:noFill/>
-                </a:ln>
-                <a:solidFill>
-                  <a:schemeClr val="tx1"/>
-                </a:solidFill>
-                <a:effectLst/>
-                <a:latin typeface="Arial" panose="020B0604020202020204" pitchFamily="34" charset="0"/>
-              </a:rPr>
-              <a:t>Easier testing </a:t>
-            </a:r>
-          </a:p>
-          <a:p>
-            <a:pPr lvl="1" eaLnBrk="0" fontAlgn="base" hangingPunct="0">
-              <a:spcBef>
-                <a:spcPct val="0"/>
-              </a:spcBef>
-              <a:spcAft>
-                <a:spcPct val="0"/>
-              </a:spcAft>
-              <a:buFontTx/>
-              <a:buChar char="•"/>
-            </a:pPr>
-            <a:r>
-              <a:rPr kumimoji="0" lang="en-US" altLang="en-US" sz="1400" b="0" i="0" u="none" strike="noStrike" cap="none" normalizeH="0" baseline="0" dirty="0">
-                <a:ln>
-                  <a:noFill/>
-                </a:ln>
-                <a:solidFill>
-                  <a:schemeClr val="tx1"/>
-                </a:solidFill>
-                <a:effectLst/>
-                <a:latin typeface="Arial" panose="020B0604020202020204" pitchFamily="34" charset="0"/>
-              </a:rPr>
-              <a:t>More scalable applications</a:t>
-            </a:r>
-          </a:p>
-          <a:p>
-            <a:pPr marL="0" marR="0" lvl="0" indent="0" algn="l" defTabSz="914400" rtl="0" eaLnBrk="0" fontAlgn="base" latinLnBrk="0" hangingPunct="0">
-              <a:lnSpc>
-                <a:spcPct val="100000"/>
-              </a:lnSpc>
-              <a:spcBef>
-                <a:spcPct val="0"/>
-              </a:spcBef>
-              <a:spcAft>
-                <a:spcPct val="0"/>
-              </a:spcAft>
-              <a:buClrTx/>
-              <a:buSzTx/>
-              <a:buFontTx/>
-              <a:buNone/>
-              <a:tabLst/>
-            </a:pPr>
             <a:endParaRPr kumimoji="0" lang="en-US" altLang="en-US" b="0" i="0" u="none" strike="noStrike" cap="none" normalizeH="0" baseline="0" dirty="0">
               <a:ln>
                 <a:noFill/>
@@ -5458,10 +4950,123 @@
           </a:p>
         </p:txBody>
       </p:sp>
+      <p:pic>
+        <p:nvPicPr>
+          <p:cNvPr id="4" name="Image 3">
+            <a:extLst>
+              <a:ext uri="{FF2B5EF4-FFF2-40B4-BE49-F238E27FC236}">
+                <a16:creationId xmlns:a16="http://schemas.microsoft.com/office/drawing/2014/main" id="{0A541765-6F43-4E30-93A1-ECE8A5063CFC}"/>
+              </a:ext>
+            </a:extLst>
+          </p:cNvPr>
+          <p:cNvPicPr>
+            <a:picLocks noChangeAspect="1"/>
+          </p:cNvPicPr>
+          <p:nvPr/>
+        </p:nvPicPr>
+        <p:blipFill rotWithShape="1">
+          <a:blip r:embed="rId2"/>
+          <a:srcRect b="81968"/>
+          <a:stretch/>
+        </p:blipFill>
+        <p:spPr>
+          <a:xfrm>
+            <a:off x="1015415" y="1247077"/>
+            <a:ext cx="4815554" cy="465977"/>
+          </a:xfrm>
+          <a:prstGeom prst="rect">
+            <a:avLst/>
+          </a:prstGeom>
+          <a:ln>
+            <a:noFill/>
+          </a:ln>
+          <a:effectLst>
+            <a:outerShdw blurRad="292100" dist="139700" dir="2700000" algn="tl" rotWithShape="0">
+              <a:srgbClr val="333333">
+                <a:alpha val="65000"/>
+              </a:srgbClr>
+            </a:outerShdw>
+          </a:effectLst>
+        </p:spPr>
+      </p:pic>
+      <p:sp>
+        <p:nvSpPr>
+          <p:cNvPr id="5" name="Rectangle 4">
+            <a:extLst>
+              <a:ext uri="{FF2B5EF4-FFF2-40B4-BE49-F238E27FC236}">
+                <a16:creationId xmlns:a16="http://schemas.microsoft.com/office/drawing/2014/main" id="{1E2E30BF-5D3F-4EBE-82EA-B055F57DA583}"/>
+              </a:ext>
+            </a:extLst>
+          </p:cNvPr>
+          <p:cNvSpPr/>
+          <p:nvPr/>
+        </p:nvSpPr>
+        <p:spPr>
+          <a:xfrm>
+            <a:off x="744883" y="2110905"/>
+            <a:ext cx="1876347" cy="369332"/>
+          </a:xfrm>
+          <a:prstGeom prst="rect">
+            <a:avLst/>
+          </a:prstGeom>
+        </p:spPr>
+        <p:txBody>
+          <a:bodyPr wrap="none">
+            <a:spAutoFit/>
+          </a:bodyPr>
+          <a:lstStyle/>
+          <a:p>
+            <a:r>
+              <a:rPr lang="en-US" b="1" dirty="0"/>
+              <a:t>Adding Attributes</a:t>
+            </a:r>
+          </a:p>
+        </p:txBody>
+      </p:sp>
+      <p:pic>
+        <p:nvPicPr>
+          <p:cNvPr id="6" name="Image 5">
+            <a:extLst>
+              <a:ext uri="{FF2B5EF4-FFF2-40B4-BE49-F238E27FC236}">
+                <a16:creationId xmlns:a16="http://schemas.microsoft.com/office/drawing/2014/main" id="{55D479F3-13EE-41F6-A976-996EEFA7D7E7}"/>
+              </a:ext>
+            </a:extLst>
+          </p:cNvPr>
+          <p:cNvPicPr>
+            <a:picLocks noChangeAspect="1"/>
+          </p:cNvPicPr>
+          <p:nvPr/>
+        </p:nvPicPr>
+        <p:blipFill>
+          <a:blip r:embed="rId3"/>
+          <a:stretch>
+            <a:fillRect/>
+          </a:stretch>
+        </p:blipFill>
+        <p:spPr>
+          <a:xfrm>
+            <a:off x="974902" y="2715675"/>
+            <a:ext cx="4815554" cy="1656305"/>
+          </a:xfrm>
+          <a:prstGeom prst="rect">
+            <a:avLst/>
+          </a:prstGeom>
+          <a:ln>
+            <a:noFill/>
+          </a:ln>
+          <a:effectLst>
+            <a:outerShdw blurRad="292100" dist="139700" dir="2700000" algn="tl" rotWithShape="0">
+              <a:srgbClr val="333333">
+                <a:alpha val="65000"/>
+              </a:srgbClr>
+            </a:outerShdw>
+          </a:effectLst>
+        </p:spPr>
+      </p:pic>
     </p:spTree>
     <p:extLst>
       <p:ext uri="{BB962C8B-B14F-4D97-AF65-F5344CB8AC3E}">
-        <p14:creationId xmlns:p14="http://schemas.microsoft.com/office/powerpoint/2010/main" val="3296483826"/>
+        <p14:creationId xmlns:p14="http://schemas.microsoft.com/office/powerpoint/2010/main" val="15866541"/>
       </p:ext>
     </p:extLst>
   </p:cSld>
@@ -5490,204 +5095,390 @@
       </p:grpSpPr>
       <p:sp>
         <p:nvSpPr>
-          <p:cNvPr id="3" name="Rectangle 2">
-            <a:extLst>
-              <a:ext uri="{FF2B5EF4-FFF2-40B4-BE49-F238E27FC236}">
-                <a16:creationId xmlns:a16="http://schemas.microsoft.com/office/drawing/2014/main" id="{A7297B1F-75BE-43C2-9DE4-7B5A29C24859}"/>
-              </a:ext>
-            </a:extLst>
-          </p:cNvPr>
-          <p:cNvSpPr/>
+          <p:cNvPr id="3" name="Rectangle 1">
+            <a:extLst>
+              <a:ext uri="{FF2B5EF4-FFF2-40B4-BE49-F238E27FC236}">
+                <a16:creationId xmlns:a16="http://schemas.microsoft.com/office/drawing/2014/main" id="{84883337-30B4-4166-A8D1-8EFA99DEC6FF}"/>
+              </a:ext>
+            </a:extLst>
+          </p:cNvPr>
+          <p:cNvSpPr>
+            <a:spLocks noChangeArrowheads="1"/>
+          </p:cNvSpPr>
           <p:nvPr/>
         </p:nvSpPr>
-        <p:spPr>
+        <p:spPr bwMode="auto">
           <a:xfrm>
-            <a:off x="805320" y="573782"/>
-            <a:ext cx="2994731" cy="461665"/>
+            <a:off x="381965" y="431686"/>
+            <a:ext cx="8484243" cy="369332"/>
           </a:xfrm>
           <a:prstGeom prst="rect">
             <a:avLst/>
           </a:prstGeom>
+          <a:noFill/>
+          <a:ln>
+            <a:noFill/>
+          </a:ln>
+          <a:effectLst/>
+          <a:extLst>
+            <a:ext uri="{909E8E84-426E-40DD-AFC4-6F175D3DCCD1}">
+              <a14:hiddenFill xmlns:a14="http://schemas.microsoft.com/office/drawing/2010/main">
+                <a:solidFill>
+                  <a:schemeClr val="accent1"/>
+                </a:solidFill>
+              </a14:hiddenFill>
+            </a:ext>
+            <a:ext uri="{91240B29-F687-4F45-9708-019B960494DF}">
+              <a14:hiddenLine xmlns:a14="http://schemas.microsoft.com/office/drawing/2010/main" w="9525">
+                <a:solidFill>
+                  <a:schemeClr val="tx1"/>
+                </a:solidFill>
+                <a:miter lim="800000"/>
+                <a:headEnd/>
+                <a:tailEnd/>
+              </a14:hiddenLine>
+            </a:ext>
+            <a:ext uri="{AF507438-7753-43E0-B8FC-AC1667EBCBE1}">
+              <a14:hiddenEffects xmlns:a14="http://schemas.microsoft.com/office/drawing/2010/main">
+                <a:effectLst>
+                  <a:outerShdw dist="35921" dir="2700000" algn="ctr" rotWithShape="0">
+                    <a:schemeClr val="bg2"/>
+                  </a:outerShdw>
+                </a:effectLst>
+              </a14:hiddenEffects>
+            </a:ext>
+          </a:extLst>
         </p:spPr>
         <p:txBody>
-          <a:bodyPr wrap="none">
+          <a:bodyPr vert="horz" wrap="square" lIns="91440" tIns="45720" rIns="91440" bIns="45720" numCol="1" anchor="ctr" anchorCtr="0" compatLnSpc="1">
+            <a:prstTxWarp prst="textNoShape">
+              <a:avLst/>
+            </a:prstTxWarp>
             <a:spAutoFit/>
           </a:bodyPr>
           <a:lstStyle/>
           <a:p>
-            <a:r>
-              <a:rPr lang="en-US" sz="2400" b="1" dirty="0"/>
-              <a:t>3. Objects and Classes</a:t>
-            </a:r>
-          </a:p>
-        </p:txBody>
-      </p:sp>
-      <p:sp>
-        <p:nvSpPr>
-          <p:cNvPr id="4" name="Rectangle 3">
-            <a:extLst>
-              <a:ext uri="{FF2B5EF4-FFF2-40B4-BE49-F238E27FC236}">
-                <a16:creationId xmlns:a16="http://schemas.microsoft.com/office/drawing/2014/main" id="{4DD69371-5432-4834-A563-E6EFFA57AD26}"/>
-              </a:ext>
-            </a:extLst>
-          </p:cNvPr>
-          <p:cNvSpPr/>
+            <a:pPr marL="0" marR="0" lvl="0" indent="0" algn="l" defTabSz="914400" rtl="0" eaLnBrk="0" fontAlgn="base" latinLnBrk="0" hangingPunct="0">
+              <a:lnSpc>
+                <a:spcPct val="100000"/>
+              </a:lnSpc>
+              <a:spcBef>
+                <a:spcPct val="0"/>
+              </a:spcBef>
+              <a:spcAft>
+                <a:spcPct val="0"/>
+              </a:spcAft>
+              <a:buClrTx/>
+              <a:buSzTx/>
+              <a:buFontTx/>
+              <a:buNone/>
+              <a:tabLst/>
+            </a:pPr>
+            <a:r>
+              <a:rPr kumimoji="0" lang="en-US" altLang="en-US" b="1" i="0" u="none" strike="noStrike" cap="none" normalizeH="0" baseline="0" dirty="0">
+                <a:ln>
+                  <a:noFill/>
+                </a:ln>
+                <a:solidFill>
+                  <a:schemeClr val="tx1"/>
+                </a:solidFill>
+                <a:effectLst/>
+                <a:latin typeface="Arial" panose="020B0604020202020204" pitchFamily="34" charset="0"/>
+              </a:rPr>
+              <a:t>Constructor (</a:t>
+            </a:r>
+            <a:r>
+              <a:rPr kumimoji="0" lang="en-US" altLang="en-US" b="1" i="0" u="none" strike="noStrike" cap="none" normalizeH="0" baseline="0" dirty="0">
+                <a:ln>
+                  <a:noFill/>
+                </a:ln>
+                <a:solidFill>
+                  <a:schemeClr val="tx1"/>
+                </a:solidFill>
+                <a:effectLst/>
+                <a:latin typeface="Arial Unicode MS"/>
+              </a:rPr>
+              <a:t>__</a:t>
+            </a:r>
+            <a:r>
+              <a:rPr kumimoji="0" lang="en-US" altLang="en-US" b="1" i="0" u="none" strike="noStrike" cap="none" normalizeH="0" baseline="0" dirty="0" err="1">
+                <a:ln>
+                  <a:noFill/>
+                </a:ln>
+                <a:solidFill>
+                  <a:schemeClr val="tx1"/>
+                </a:solidFill>
+                <a:effectLst/>
+                <a:latin typeface="Arial Unicode MS"/>
+              </a:rPr>
+              <a:t>init</a:t>
+            </a:r>
+            <a:r>
+              <a:rPr kumimoji="0" lang="en-US" altLang="en-US" b="1" i="0" u="none" strike="noStrike" cap="none" normalizeH="0" baseline="0" dirty="0">
+                <a:ln>
+                  <a:noFill/>
+                </a:ln>
+                <a:solidFill>
+                  <a:schemeClr val="tx1"/>
+                </a:solidFill>
+                <a:effectLst/>
+                <a:latin typeface="Arial Unicode MS"/>
+              </a:rPr>
+              <a:t>__</a:t>
+            </a:r>
+            <a:r>
+              <a:rPr kumimoji="0" lang="en-US" altLang="en-US" b="1" i="0" u="none" strike="noStrike" cap="none" normalizeH="0" baseline="0" dirty="0">
+                <a:ln>
+                  <a:noFill/>
+                </a:ln>
+                <a:solidFill>
+                  <a:schemeClr val="tx1"/>
+                </a:solidFill>
+                <a:effectLst/>
+              </a:rPr>
+              <a:t>) </a:t>
+            </a:r>
+            <a:endParaRPr kumimoji="0" lang="en-US" altLang="en-US" b="1" i="0" u="none" strike="noStrike" cap="none" normalizeH="0" baseline="0" dirty="0">
+              <a:ln>
+                <a:noFill/>
+              </a:ln>
+              <a:solidFill>
+                <a:schemeClr val="tx1"/>
+              </a:solidFill>
+              <a:effectLst/>
+              <a:latin typeface="Arial" panose="020B0604020202020204" pitchFamily="34" charset="0"/>
+            </a:endParaRPr>
+          </a:p>
+        </p:txBody>
+      </p:sp>
+      <p:pic>
+        <p:nvPicPr>
+          <p:cNvPr id="4" name="Image 3">
+            <a:extLst>
+              <a:ext uri="{FF2B5EF4-FFF2-40B4-BE49-F238E27FC236}">
+                <a16:creationId xmlns:a16="http://schemas.microsoft.com/office/drawing/2014/main" id="{EFB35F6E-7498-4676-9908-747DB59538D7}"/>
+              </a:ext>
+            </a:extLst>
+          </p:cNvPr>
+          <p:cNvPicPr>
+            <a:picLocks noChangeAspect="1"/>
+          </p:cNvPicPr>
           <p:nvPr/>
-        </p:nvSpPr>
+        </p:nvPicPr>
+        <p:blipFill>
+          <a:blip r:embed="rId2"/>
+          <a:stretch>
+            <a:fillRect/>
+          </a:stretch>
+        </p:blipFill>
         <p:spPr>
           <a:xfrm>
-            <a:off x="1374777" y="1441688"/>
-            <a:ext cx="824265" cy="400110"/>
+            <a:off x="912412" y="1600150"/>
+            <a:ext cx="5397777" cy="971600"/>
           </a:xfrm>
           <a:prstGeom prst="rect">
             <a:avLst/>
           </a:prstGeom>
+          <a:ln>
+            <a:noFill/>
+          </a:ln>
+          <a:effectLst>
+            <a:outerShdw blurRad="292100" dist="139700" dir="2700000" algn="tl" rotWithShape="0">
+              <a:srgbClr val="333333">
+                <a:alpha val="65000"/>
+              </a:srgbClr>
+            </a:outerShdw>
+          </a:effectLst>
         </p:spPr>
-        <p:txBody>
-          <a:bodyPr wrap="none">
-            <a:spAutoFit/>
-          </a:bodyPr>
-          <a:lstStyle/>
-          <a:p>
-            <a:r>
-              <a:rPr lang="en-US" sz="2000" dirty="0"/>
-              <a:t>Class?</a:t>
-            </a:r>
-          </a:p>
-        </p:txBody>
-      </p:sp>
-      <p:sp>
-        <p:nvSpPr>
-          <p:cNvPr id="5" name="Rectangle 4">
-            <a:extLst>
-              <a:ext uri="{FF2B5EF4-FFF2-40B4-BE49-F238E27FC236}">
-                <a16:creationId xmlns:a16="http://schemas.microsoft.com/office/drawing/2014/main" id="{6A796A6A-A667-44DB-A6EB-AB979FA88D87}"/>
-              </a:ext>
-            </a:extLst>
-          </p:cNvPr>
-          <p:cNvSpPr/>
+      </p:pic>
+      <p:sp>
+        <p:nvSpPr>
+          <p:cNvPr id="5" name="Rectangle 2">
+            <a:extLst>
+              <a:ext uri="{FF2B5EF4-FFF2-40B4-BE49-F238E27FC236}">
+                <a16:creationId xmlns:a16="http://schemas.microsoft.com/office/drawing/2014/main" id="{DDB54B3C-7817-44A6-83B9-CBA50ECFC6EF}"/>
+              </a:ext>
+            </a:extLst>
+          </p:cNvPr>
+          <p:cNvSpPr>
+            <a:spLocks noChangeArrowheads="1"/>
+          </p:cNvSpPr>
           <p:nvPr/>
         </p:nvSpPr>
-        <p:spPr>
+        <p:spPr bwMode="auto">
           <a:xfrm>
-            <a:off x="617349" y="1900245"/>
-            <a:ext cx="4572000" cy="1477328"/>
+            <a:off x="520861" y="917822"/>
+            <a:ext cx="6607193" cy="369332"/>
           </a:xfrm>
           <a:prstGeom prst="rect">
             <a:avLst/>
           </a:prstGeom>
+          <a:noFill/>
+          <a:ln>
+            <a:noFill/>
+          </a:ln>
+          <a:effectLst/>
+          <a:extLst>
+            <a:ext uri="{909E8E84-426E-40DD-AFC4-6F175D3DCCD1}">
+              <a14:hiddenFill xmlns:a14="http://schemas.microsoft.com/office/drawing/2010/main">
+                <a:solidFill>
+                  <a:schemeClr val="accent1"/>
+                </a:solidFill>
+              </a14:hiddenFill>
+            </a:ext>
+            <a:ext uri="{91240B29-F687-4F45-9708-019B960494DF}">
+              <a14:hiddenLine xmlns:a14="http://schemas.microsoft.com/office/drawing/2010/main" w="9525">
+                <a:solidFill>
+                  <a:schemeClr val="tx1"/>
+                </a:solidFill>
+                <a:miter lim="800000"/>
+                <a:headEnd/>
+                <a:tailEnd/>
+              </a14:hiddenLine>
+            </a:ext>
+            <a:ext uri="{AF507438-7753-43E0-B8FC-AC1667EBCBE1}">
+              <a14:hiddenEffects xmlns:a14="http://schemas.microsoft.com/office/drawing/2010/main">
+                <a:effectLst>
+                  <a:outerShdw dist="35921" dir="2700000" algn="ctr" rotWithShape="0">
+                    <a:schemeClr val="bg2"/>
+                  </a:outerShdw>
+                </a:effectLst>
+              </a14:hiddenEffects>
+            </a:ext>
+          </a:extLst>
         </p:spPr>
         <p:txBody>
-          <a:bodyPr>
+          <a:bodyPr vert="horz" wrap="none" lIns="91440" tIns="45720" rIns="91440" bIns="45720" numCol="1" anchor="ctr" anchorCtr="0" compatLnSpc="1">
+            <a:prstTxWarp prst="textNoShape">
+              <a:avLst/>
+            </a:prstTxWarp>
             <a:spAutoFit/>
           </a:bodyPr>
           <a:lstStyle/>
           <a:p>
-            <a:r>
-              <a:rPr lang="en-US" dirty="0"/>
-              <a:t>A class is a blueprint or template used to create objects.</a:t>
-            </a:r>
-          </a:p>
-          <a:p>
-            <a:r>
-              <a:rPr lang="en-US" dirty="0"/>
-              <a:t>Think of a class as an architectural plan.</a:t>
-            </a:r>
-          </a:p>
-          <a:p>
-            <a:r>
-              <a:rPr lang="en-US" dirty="0"/>
-              <a:t>The plan is </a:t>
-            </a:r>
-            <a:r>
-              <a:rPr lang="en-US" b="1" dirty="0"/>
-              <a:t>not</a:t>
-            </a:r>
-            <a:r>
-              <a:rPr lang="en-US" dirty="0"/>
-              <a:t> the house.</a:t>
-            </a:r>
-          </a:p>
-          <a:p>
-            <a:r>
-              <a:rPr lang="en-US" dirty="0"/>
-              <a:t>It is used to build many houses.</a:t>
-            </a:r>
-          </a:p>
-        </p:txBody>
-      </p:sp>
-      <p:sp>
-        <p:nvSpPr>
-          <p:cNvPr id="6" name="Rectangle 5">
-            <a:extLst>
-              <a:ext uri="{FF2B5EF4-FFF2-40B4-BE49-F238E27FC236}">
-                <a16:creationId xmlns:a16="http://schemas.microsoft.com/office/drawing/2014/main" id="{18EDE950-C6FC-47B4-9A0E-7B4A1DF5B7AC}"/>
-              </a:ext>
-            </a:extLst>
-          </p:cNvPr>
-          <p:cNvSpPr/>
+            <a:pPr marL="0" marR="0" lvl="0" indent="0" algn="l" defTabSz="914400" rtl="0" eaLnBrk="0" fontAlgn="base" latinLnBrk="0" hangingPunct="0">
+              <a:lnSpc>
+                <a:spcPct val="100000"/>
+              </a:lnSpc>
+              <a:spcBef>
+                <a:spcPct val="0"/>
+              </a:spcBef>
+              <a:spcAft>
+                <a:spcPct val="0"/>
+              </a:spcAft>
+              <a:buClrTx/>
+              <a:buSzTx/>
+              <a:buFontTx/>
+              <a:buNone/>
+              <a:tabLst/>
+            </a:pPr>
+            <a:r>
+              <a:rPr kumimoji="0" lang="en-US" altLang="en-US" b="0" i="0" u="none" strike="noStrike" cap="none" normalizeH="0" baseline="0" dirty="0">
+                <a:ln>
+                  <a:noFill/>
+                </a:ln>
+                <a:solidFill>
+                  <a:schemeClr val="tx1"/>
+                </a:solidFill>
+                <a:effectLst/>
+                <a:latin typeface="Arial Unicode MS"/>
+              </a:rPr>
+              <a:t>__</a:t>
+            </a:r>
+            <a:r>
+              <a:rPr kumimoji="0" lang="en-US" altLang="en-US" b="0" i="0" u="none" strike="noStrike" cap="none" normalizeH="0" baseline="0" dirty="0" err="1">
+                <a:ln>
+                  <a:noFill/>
+                </a:ln>
+                <a:solidFill>
+                  <a:schemeClr val="tx1"/>
+                </a:solidFill>
+                <a:effectLst/>
+                <a:latin typeface="Arial Unicode MS"/>
+              </a:rPr>
+              <a:t>init</a:t>
+            </a:r>
+            <a:r>
+              <a:rPr kumimoji="0" lang="en-US" altLang="en-US" b="0" i="0" u="none" strike="noStrike" cap="none" normalizeH="0" baseline="0" dirty="0">
+                <a:ln>
+                  <a:noFill/>
+                </a:ln>
+                <a:solidFill>
+                  <a:schemeClr val="tx1"/>
+                </a:solidFill>
+                <a:effectLst/>
+                <a:latin typeface="Arial Unicode MS"/>
+              </a:rPr>
+              <a:t>__()</a:t>
+            </a:r>
+            <a:r>
+              <a:rPr kumimoji="0" lang="en-US" altLang="en-US" b="0" i="0" u="none" strike="noStrike" cap="none" normalizeH="0" baseline="0" dirty="0">
+                <a:ln>
+                  <a:noFill/>
+                </a:ln>
+                <a:solidFill>
+                  <a:schemeClr val="tx1"/>
+                </a:solidFill>
+                <a:effectLst/>
+              </a:rPr>
+              <a:t> is a method runs automatically when an object is created. </a:t>
+            </a:r>
+            <a:endParaRPr kumimoji="0" lang="en-US" altLang="en-US" b="0" i="0" u="none" strike="noStrike" cap="none" normalizeH="0" baseline="0" dirty="0">
+              <a:ln>
+                <a:noFill/>
+              </a:ln>
+              <a:solidFill>
+                <a:schemeClr val="tx1"/>
+              </a:solidFill>
+              <a:effectLst/>
+              <a:latin typeface="Arial" panose="020B0604020202020204" pitchFamily="34" charset="0"/>
+            </a:endParaRPr>
+          </a:p>
+        </p:txBody>
+      </p:sp>
+      <p:pic>
+        <p:nvPicPr>
+          <p:cNvPr id="6" name="Image 5">
+            <a:extLst>
+              <a:ext uri="{FF2B5EF4-FFF2-40B4-BE49-F238E27FC236}">
+                <a16:creationId xmlns:a16="http://schemas.microsoft.com/office/drawing/2014/main" id="{566C5035-8575-4F14-85ED-AA7DC18626F0}"/>
+              </a:ext>
+            </a:extLst>
+          </p:cNvPr>
+          <p:cNvPicPr>
+            <a:picLocks noChangeAspect="1"/>
+          </p:cNvPicPr>
           <p:nvPr/>
-        </p:nvSpPr>
+        </p:nvPicPr>
+        <p:blipFill rotWithShape="1">
+          <a:blip r:embed="rId3"/>
+          <a:srcRect b="81968"/>
+          <a:stretch/>
+        </p:blipFill>
         <p:spPr>
           <a:xfrm>
-            <a:off x="6544654" y="1472466"/>
-            <a:ext cx="910827" cy="369332"/>
+            <a:off x="962223" y="3334031"/>
+            <a:ext cx="5397778" cy="522316"/>
           </a:xfrm>
           <a:prstGeom prst="rect">
             <a:avLst/>
           </a:prstGeom>
+          <a:ln>
+            <a:noFill/>
+          </a:ln>
+          <a:effectLst>
+            <a:outerShdw blurRad="292100" dist="139700" dir="2700000" algn="tl" rotWithShape="0">
+              <a:srgbClr val="333333">
+                <a:alpha val="65000"/>
+              </a:srgbClr>
+            </a:outerShdw>
+          </a:effectLst>
         </p:spPr>
-        <p:txBody>
-          <a:bodyPr wrap="none">
-            <a:spAutoFit/>
-          </a:bodyPr>
-          <a:lstStyle/>
-          <a:p>
-            <a:r>
-              <a:rPr lang="en-US" dirty="0"/>
-              <a:t>Object?</a:t>
-            </a:r>
-          </a:p>
-        </p:txBody>
-      </p:sp>
-      <p:sp>
-        <p:nvSpPr>
-          <p:cNvPr id="7" name="Rectangle 6">
-            <a:extLst>
-              <a:ext uri="{FF2B5EF4-FFF2-40B4-BE49-F238E27FC236}">
-                <a16:creationId xmlns:a16="http://schemas.microsoft.com/office/drawing/2014/main" id="{E0439004-7843-4BE8-AF90-246DDD8A018B}"/>
-              </a:ext>
-            </a:extLst>
-          </p:cNvPr>
-          <p:cNvSpPr/>
-          <p:nvPr/>
-        </p:nvSpPr>
-        <p:spPr>
-          <a:xfrm>
-            <a:off x="5577190" y="2158462"/>
-            <a:ext cx="3427325" cy="646331"/>
-          </a:xfrm>
-          <a:prstGeom prst="rect">
-            <a:avLst/>
-          </a:prstGeom>
-        </p:spPr>
-        <p:txBody>
-          <a:bodyPr wrap="square">
-            <a:spAutoFit/>
-          </a:bodyPr>
-          <a:lstStyle/>
-          <a:p>
-            <a:r>
-              <a:rPr lang="en-US" dirty="0"/>
-              <a:t>An object is an actual instance created from a class.</a:t>
-            </a:r>
-          </a:p>
-        </p:txBody>
-      </p:sp>
+      </p:pic>
     </p:spTree>
     <p:extLst>
       <p:ext uri="{BB962C8B-B14F-4D97-AF65-F5344CB8AC3E}">
-        <p14:creationId xmlns:p14="http://schemas.microsoft.com/office/powerpoint/2010/main" val="1659408146"/>
+        <p14:creationId xmlns:p14="http://schemas.microsoft.com/office/powerpoint/2010/main" val="828603751"/>
       </p:ext>
     </p:extLst>
   </p:cSld>
@@ -5716,10 +5507,10 @@
       </p:grpSpPr>
       <p:pic>
         <p:nvPicPr>
-          <p:cNvPr id="3" name="Image 2">
-            <a:extLst>
-              <a:ext uri="{FF2B5EF4-FFF2-40B4-BE49-F238E27FC236}">
-                <a16:creationId xmlns:a16="http://schemas.microsoft.com/office/drawing/2014/main" id="{F5006178-7923-46F5-87AB-C864D696B01A}"/>
+          <p:cNvPr id="2" name="Image 1">
+            <a:extLst>
+              <a:ext uri="{FF2B5EF4-FFF2-40B4-BE49-F238E27FC236}">
+                <a16:creationId xmlns:a16="http://schemas.microsoft.com/office/drawing/2014/main" id="{7DEC1B1C-9944-4BF8-BA64-4209F3AB2256}"/>
               </a:ext>
             </a:extLst>
           </p:cNvPr>
@@ -5736,8 +5527,8 @@
         </p:blipFill>
         <p:spPr>
           <a:xfrm>
-            <a:off x="0" y="75902"/>
-            <a:ext cx="9144000" cy="4991695"/>
+            <a:off x="746589" y="0"/>
+            <a:ext cx="7650822" cy="5143500"/>
           </a:xfrm>
           <a:prstGeom prst="rect">
             <a:avLst/>
@@ -5747,7 +5538,7 @@
     </p:spTree>
     <p:extLst>
       <p:ext uri="{BB962C8B-B14F-4D97-AF65-F5344CB8AC3E}">
-        <p14:creationId xmlns:p14="http://schemas.microsoft.com/office/powerpoint/2010/main" val="2312019106"/>
+        <p14:creationId xmlns:p14="http://schemas.microsoft.com/office/powerpoint/2010/main" val="1578130578"/>
       </p:ext>
     </p:extLst>
   </p:cSld>
